--- a/slides/ibis-optionality-slides.pptx
+++ b/slides/ibis-optionality-slides.pptx
@@ -5,7 +5,7 @@
     <p:sldMasterId id="2147483648" r:id="rId1"/>
   </p:sldMasterIdLst>
   <p:notesMasterIdLst>
-    <p:notesMasterId r:id="rId22"/>
+    <p:notesMasterId r:id="rId24"/>
   </p:notesMasterIdLst>
   <p:sldIdLst>
     <p:sldId id="256" r:id="rId2"/>
@@ -25,9 +25,11 @@
     <p:sldId id="270" r:id="rId16"/>
     <p:sldId id="271" r:id="rId17"/>
     <p:sldId id="272" r:id="rId18"/>
-    <p:sldId id="273" r:id="rId19"/>
-    <p:sldId id="274" r:id="rId20"/>
-    <p:sldId id="275" r:id="rId21"/>
+    <p:sldId id="276" r:id="rId19"/>
+    <p:sldId id="277" r:id="rId20"/>
+    <p:sldId id="273" r:id="rId21"/>
+    <p:sldId id="274" r:id="rId22"/>
+    <p:sldId id="275" r:id="rId23"/>
   </p:sldIdLst>
   <p:sldSz cx="12192000" cy="6858000"/>
   <p:notesSz cx="6858000" cy="12192000"/>
@@ -1077,7 +1079,7 @@
           <a:p>
             <a:fld id="{F7021451-1387-4CA6-816F-3879F97B5CBC}" type="slidenum">
               <a:rPr lang="en-US"/>
-              <a:t>18</a:t>
+              <a:t>20</a:t>
             </a:fld>
             <a:endParaRPr lang="en-US"/>
           </a:p>
@@ -1161,7 +1163,7 @@
           <a:p>
             <a:fld id="{F7021451-1387-4CA6-816F-3879F97B5CBC}" type="slidenum">
               <a:rPr lang="en-US"/>
-              <a:t>19</a:t>
+              <a:t>21</a:t>
             </a:fld>
             <a:endParaRPr lang="en-US"/>
           </a:p>
@@ -1329,7 +1331,7 @@
           <a:p>
             <a:fld id="{F7021451-1387-4CA6-816F-3879F97B5CBC}" type="slidenum">
               <a:rPr lang="en-US"/>
-              <a:t>20</a:t>
+              <a:t>22</a:t>
             </a:fld>
             <a:endParaRPr lang="en-US"/>
           </a:p>
@@ -2469,7 +2471,7 @@
                 <a:ea typeface="Calibri" pitchFamily="34" charset="-122"/>
                 <a:cs typeface="Calibri" pitchFamily="34" charset="-120"/>
               </a:rPr>
-              <a:t>One Python dataframe API. 20-ish backends. Your choice, any time.</a:t>
+              <a:t>One Python dataframe API. More than 20 backends. Your choice, any time.</a:t>
             </a:r>
             <a:endParaRPr lang="en-US" sz="1500" dirty="0"/>
           </a:p>
@@ -7404,7 +7406,7 @@
         <p:spPr>
           <a:xfrm>
             <a:off x="548640" y="777240"/>
-            <a:ext cx="9601200" cy="822960"/>
+            <a:ext cx="10725912" cy="822960"/>
           </a:xfrm>
           <a:prstGeom prst="rect">
             <a:avLst/>
@@ -7428,7 +7430,7 @@
                 <a:ea typeface="Cambria" pitchFamily="34" charset="-122"/>
                 <a:cs typeface="Cambria" pitchFamily="34" charset="-120"/>
               </a:rPr>
-              <a:t>Mix SQL and dataframe code, freely, in either direction</a:t>
+              <a:t>Mix SQL &amp; dataframe code, freely, in either direction</a:t>
             </a:r>
             <a:endParaRPr lang="en-US" sz="3200" dirty="0"/>
           </a:p>
@@ -9992,7 +9994,7 @@
 
 <file path=ppt/slides/slide18.xml><?xml version="1.0" encoding="utf-8"?>
 <p:sld xmlns:a="http://schemas.openxmlformats.org/drawingml/2006/main" xmlns:r="http://schemas.openxmlformats.org/officeDocument/2006/relationships" xmlns:p="http://schemas.openxmlformats.org/presentationml/2006/main">
-  <p:cSld name="Slide 18">
+  <p:cSld name="Slide 21">
     <p:bg>
       <p:bgPr>
         <a:solidFill>
@@ -10017,7 +10019,7 @@
       </p:grpSpPr>
       <p:sp>
         <p:nvSpPr>
-          <p:cNvPr id="2" name="Text 0"/>
+          <p:cNvPr id="2" name="Eyebrow"/>
           <p:cNvSpPr txBox="1"/>
           <p:nvPr/>
         </p:nvSpPr>
@@ -10048,7 +10050,7 @@
                 <a:ea typeface="Calibri" pitchFamily="34" charset="-122"/>
                 <a:cs typeface="Calibri" pitchFamily="34" charset="-120"/>
               </a:rPr>
-              <a:t>WHY IT MATTERS</a:t>
+              <a:t>THE FINE PRINT</a:t>
             </a:r>
             <a:endParaRPr lang="en-US" sz="1300" dirty="0"/>
           </a:p>
@@ -10056,14 +10058,14 @@
       </p:sp>
       <p:sp>
         <p:nvSpPr>
-          <p:cNvPr id="3" name="Text 1"/>
+          <p:cNvPr id="3" name="Title"/>
           <p:cNvSpPr txBox="1"/>
           <p:nvPr/>
         </p:nvSpPr>
         <p:spPr>
           <a:xfrm>
             <a:off x="548640" y="777240"/>
-            <a:ext cx="9601200" cy="822960"/>
+            <a:ext cx="10500000" cy="822960"/>
           </a:xfrm>
           <a:prstGeom prst="rect">
             <a:avLst/>
@@ -10087,7 +10089,7 @@
                 <a:ea typeface="Cambria" pitchFamily="34" charset="-122"/>
                 <a:cs typeface="Cambria" pitchFamily="34" charset="-120"/>
               </a:rPr>
-              <a:t>Optionality is leverage — for your project, and your career</a:t>
+              <a:t>Same code, not always the same answer</a:t>
             </a:r>
             <a:endParaRPr lang="en-US" sz="3200" dirty="0"/>
           </a:p>
@@ -10095,14 +10097,14 @@
       </p:sp>
       <p:sp>
         <p:nvSpPr>
-          <p:cNvPr id="4" name="Shape 2"/>
+          <p:cNvPr id="4" name="Card 4"/>
           <p:cNvSpPr/>
           <p:nvPr/>
         </p:nvSpPr>
         <p:spPr>
           <a:xfrm>
             <a:off x="548640" y="1965960"/>
-            <a:ext cx="3520440" cy="3566160"/>
+            <a:ext cx="3520440" cy="3200400"/>
           </a:xfrm>
           <a:prstGeom prst="roundRect">
             <a:avLst>
@@ -10124,7 +10126,7 @@
       </p:sp>
       <p:sp>
         <p:nvSpPr>
-          <p:cNvPr id="5" name="Shape 3"/>
+          <p:cNvPr id="5" name="Badge 1"/>
           <p:cNvSpPr/>
           <p:nvPr/>
         </p:nvSpPr>
@@ -10149,40 +10151,16 @@
           </a:p>
         </p:txBody>
       </p:sp>
-      <p:pic>
-        <p:nvPicPr>
-          <p:cNvPr id="6" name="Image 0" descr="/home/claude/ibis-talk/icons/bolt.png"/>
-          <p:cNvPicPr>
-            <a:picLocks noChangeAspect="1"/>
-          </p:cNvPicPr>
-          <p:nvPr/>
-        </p:nvPicPr>
-        <p:blipFill>
-          <a:blip r:embed="rId3"/>
-          <a:stretch>
-            <a:fillRect/>
-          </a:stretch>
-        </p:blipFill>
-        <p:spPr>
-          <a:xfrm>
-            <a:off x="909279" y="2326599"/>
-            <a:ext cx="430865" cy="430865"/>
-          </a:xfrm>
-          <a:prstGeom prst="rect">
-            <a:avLst/>
-          </a:prstGeom>
-        </p:spPr>
-      </p:pic>
-      <p:sp>
-        <p:nvSpPr>
-          <p:cNvPr id="7" name="Text 4"/>
+      <p:sp>
+        <p:nvSpPr>
+          <p:cNvPr id="6" name="BadgeNum 1"/>
           <p:cNvSpPr txBox="1"/>
           <p:nvPr/>
         </p:nvSpPr>
         <p:spPr>
           <a:xfrm>
-            <a:off x="841248" y="3063240"/>
-            <a:ext cx="2935224" cy="868680"/>
+            <a:off x="841248" y="2258568"/>
+            <a:ext cx="566928" cy="566928"/>
           </a:xfrm>
           <a:prstGeom prst="rect">
             <a:avLst/>
@@ -10194,37 +10172,34 @@
           <a:bodyPr wrap="square" lIns="0" tIns="0" rIns="0" bIns="0" rtlCol="0" anchor="ctr"/>
           <a:lstStyle/>
           <a:p>
-            <a:pPr marL="0" indent="0">
-              <a:lnSpc>
-                <a:spcPct val="115000"/>
-              </a:lnSpc>
-              <a:buNone/>
-            </a:pPr>
-            <a:r>
-              <a:rPr lang="en-US" sz="1650" b="1" dirty="0">
-                <a:solidFill>
-                  <a:srgbClr val="21295C"/>
+            <a:pPr marL="0" indent="0" algn="ctr">
+              <a:buNone/>
+            </a:pPr>
+            <a:r>
+              <a:rPr lang="en-US" sz="2000" b="1" dirty="0">
+                <a:solidFill>
+                  <a:srgbClr val="FFFFFF"/>
                 </a:solidFill>
                 <a:latin typeface="Cambria" pitchFamily="34" charset="0"/>
                 <a:ea typeface="Cambria" pitchFamily="34" charset="-122"/>
                 <a:cs typeface="Cambria" pitchFamily="34" charset="-120"/>
               </a:rPr>
-              <a:t>Prototype fast, ship without rewrites</a:t>
-            </a:r>
-            <a:endParaRPr lang="en-US" sz="1650" dirty="0"/>
-          </a:p>
-        </p:txBody>
-      </p:sp>
-      <p:sp>
-        <p:nvSpPr>
-          <p:cNvPr id="8" name="Text 5"/>
+              <a:t>1</a:t>
+            </a:r>
+            <a:endParaRPr lang="en-US" sz="2000" dirty="0"/>
+          </a:p>
+        </p:txBody>
+      </p:sp>
+      <p:sp>
+        <p:nvSpPr>
+          <p:cNvPr id="7" name="CardHead0"/>
           <p:cNvSpPr txBox="1"/>
           <p:nvPr/>
         </p:nvSpPr>
         <p:spPr>
           <a:xfrm>
-            <a:off x="841248" y="3931920"/>
-            <a:ext cx="2935224" cy="1417320"/>
+            <a:off x="822960" y="3072384"/>
+            <a:ext cx="2971800" cy="685800"/>
           </a:xfrm>
           <a:prstGeom prst="rect">
             <a:avLst/>
@@ -10233,17 +10208,59 @@
           <a:ln/>
         </p:spPr>
         <p:txBody>
-          <a:bodyPr wrap="square" lIns="0" tIns="0" rIns="0" bIns="0" rtlCol="0" anchor="ctr"/>
+          <a:bodyPr wrap="square" lIns="0" tIns="0" rIns="0" bIns="0" rtlCol="0" anchor="t"/>
           <a:lstStyle/>
           <a:p>
             <a:pPr marL="0" indent="0">
               <a:lnSpc>
-                <a:spcPct val="130000"/>
+                <a:spcPct val="112000"/>
               </a:lnSpc>
               <a:buNone/>
             </a:pPr>
             <a:r>
-              <a:rPr lang="en-US" sz="1300" dirty="0">
+              <a:rPr lang="en-US" sz="1600" b="1" dirty="0">
+                <a:solidFill>
+                  <a:srgbClr val="21295C"/>
+                </a:solidFill>
+                <a:latin typeface="Cambria" pitchFamily="34" charset="0"/>
+                <a:ea typeface="Cambria" pitchFamily="34" charset="-122"/>
+                <a:cs typeface="Cambria" pitchFamily="34" charset="-120"/>
+              </a:rPr>
+              <a:t>Unsupported operations</a:t>
+            </a:r>
+            <a:endParaRPr lang="en-US" sz="1600" dirty="0"/>
+          </a:p>
+        </p:txBody>
+      </p:sp>
+      <p:sp>
+        <p:nvSpPr>
+          <p:cNvPr id="8" name="CardBody0"/>
+          <p:cNvSpPr txBox="1"/>
+          <p:nvPr/>
+        </p:nvSpPr>
+        <p:spPr>
+          <a:xfrm>
+            <a:off x="822960" y="3862704"/>
+            <a:ext cx="2971800" cy="1280160"/>
+          </a:xfrm>
+          <a:prstGeom prst="rect">
+            <a:avLst/>
+          </a:prstGeom>
+          <a:noFill/>
+          <a:ln/>
+        </p:spPr>
+        <p:txBody>
+          <a:bodyPr wrap="square" lIns="0" tIns="0" rIns="0" bIns="0" rtlCol="0" anchor="t"/>
+          <a:lstStyle/>
+          <a:p>
+            <a:pPr marL="0" indent="0">
+              <a:lnSpc>
+                <a:spcPct val="128000"/>
+              </a:lnSpc>
+              <a:buNone/>
+            </a:pPr>
+            <a:r>
+              <a:rPr lang="en-US" sz="1200" dirty="0">
                 <a:solidFill>
                   <a:srgbClr val="5C6B85"/>
                 </a:solidFill>
@@ -10251,22 +10268,44 @@
                 <a:ea typeface="Calibri" pitchFamily="34" charset="-122"/>
                 <a:cs typeface="Calibri" pitchFamily="34" charset="-120"/>
               </a:rPr>
-              <a:t>Build and test locally on DuckDB, then point at production infrastructure with a config change, not a rewrite.</a:t>
-            </a:r>
-            <a:endParaRPr lang="en-US" sz="1300" dirty="0"/>
-          </a:p>
-        </p:txBody>
-      </p:sp>
-      <p:sp>
-        <p:nvSpPr>
-          <p:cNvPr id="9" name="Shape 6"/>
+              <a:t>An expression with no equivalent on the target backend fails with </a:t>
+            </a:r>
+            <a:r>
+              <a:rPr lang="en-US" sz="1200" dirty="0">
+                <a:solidFill>
+                  <a:srgbClr val="5C6B85"/>
+                </a:solidFill>
+                <a:latin typeface="Courier New" pitchFamily="34" charset="0"/>
+                <a:ea typeface="Courier New" pitchFamily="34" charset="-122"/>
+                <a:cs typeface="Courier New" pitchFamily="34" charset="-120"/>
+              </a:rPr>
+              <a:t>OperationNotDefinedError</a:t>
+            </a:r>
+            <a:r>
+              <a:rPr lang="en-US" sz="1200" dirty="0">
+                <a:solidFill>
+                  <a:srgbClr val="5C6B85"/>
+                </a:solidFill>
+                <a:latin typeface="Calibri" pitchFamily="34" charset="0"/>
+                <a:ea typeface="Calibri" pitchFamily="34" charset="-122"/>
+                <a:cs typeface="Calibri" pitchFamily="34" charset="-120"/>
+              </a:rPr>
+              <a:t> at compile time — before any data moves. Quick to catch, but still a code change.</a:t>
+            </a:r>
+            <a:endParaRPr lang="en-US" sz="1200" dirty="0"/>
+          </a:p>
+        </p:txBody>
+      </p:sp>
+      <p:sp>
+        <p:nvSpPr>
+          <p:cNvPr id="9" name="Card 9"/>
           <p:cNvSpPr/>
           <p:nvPr/>
         </p:nvSpPr>
         <p:spPr>
           <a:xfrm>
             <a:off x="4343400" y="1965960"/>
-            <a:ext cx="3520440" cy="3566160"/>
+            <a:ext cx="3520440" cy="3200400"/>
           </a:xfrm>
           <a:prstGeom prst="roundRect">
             <a:avLst>
@@ -10288,7 +10327,7 @@
       </p:sp>
       <p:sp>
         <p:nvSpPr>
-          <p:cNvPr id="10" name="Shape 7"/>
+          <p:cNvPr id="10" name="Badge 2"/>
           <p:cNvSpPr/>
           <p:nvPr/>
         </p:nvSpPr>
@@ -10313,40 +10352,16 @@
           </a:p>
         </p:txBody>
       </p:sp>
-      <p:pic>
-        <p:nvPicPr>
-          <p:cNvPr id="11" name="Image 1" descr="/home/claude/ibis-talk/icons/route.png"/>
-          <p:cNvPicPr>
-            <a:picLocks noChangeAspect="1"/>
-          </p:cNvPicPr>
-          <p:nvPr/>
-        </p:nvPicPr>
-        <p:blipFill>
-          <a:blip r:embed="rId4"/>
-          <a:stretch>
-            <a:fillRect/>
-          </a:stretch>
-        </p:blipFill>
-        <p:spPr>
-          <a:xfrm>
-            <a:off x="4704039" y="2326599"/>
-            <a:ext cx="430865" cy="430865"/>
-          </a:xfrm>
-          <a:prstGeom prst="rect">
-            <a:avLst/>
-          </a:prstGeom>
-        </p:spPr>
-      </p:pic>
-      <p:sp>
-        <p:nvSpPr>
-          <p:cNvPr id="12" name="Text 8"/>
+      <p:sp>
+        <p:nvSpPr>
+          <p:cNvPr id="11" name="BadgeNum 2"/>
           <p:cNvSpPr txBox="1"/>
           <p:nvPr/>
         </p:nvSpPr>
         <p:spPr>
           <a:xfrm>
-            <a:off x="4636008" y="3063240"/>
-            <a:ext cx="2935224" cy="868680"/>
+            <a:off x="4636008" y="2258568"/>
+            <a:ext cx="566928" cy="566928"/>
           </a:xfrm>
           <a:prstGeom prst="rect">
             <a:avLst/>
@@ -10358,37 +10373,34 @@
           <a:bodyPr wrap="square" lIns="0" tIns="0" rIns="0" bIns="0" rtlCol="0" anchor="ctr"/>
           <a:lstStyle/>
           <a:p>
-            <a:pPr marL="0" indent="0">
-              <a:lnSpc>
-                <a:spcPct val="115000"/>
-              </a:lnSpc>
-              <a:buNone/>
-            </a:pPr>
-            <a:r>
-              <a:rPr lang="en-US" sz="1650" b="1" dirty="0">
-                <a:solidFill>
-                  <a:srgbClr val="21295C"/>
+            <a:pPr marL="0" indent="0" algn="ctr">
+              <a:buNone/>
+            </a:pPr>
+            <a:r>
+              <a:rPr lang="en-US" sz="2000" b="1" dirty="0">
+                <a:solidFill>
+                  <a:srgbClr val="FFFFFF"/>
                 </a:solidFill>
                 <a:latin typeface="Cambria" pitchFamily="34" charset="0"/>
                 <a:ea typeface="Cambria" pitchFamily="34" charset="-122"/>
                 <a:cs typeface="Cambria" pitchFamily="34" charset="-120"/>
               </a:rPr>
-              <a:t>Never married to one platform</a:t>
-            </a:r>
-            <a:endParaRPr lang="en-US" sz="1650" dirty="0"/>
-          </a:p>
-        </p:txBody>
-      </p:sp>
-      <p:sp>
-        <p:nvSpPr>
-          <p:cNvPr id="13" name="Text 9"/>
+              <a:t>2</a:t>
+            </a:r>
+            <a:endParaRPr lang="en-US" sz="2000" dirty="0"/>
+          </a:p>
+        </p:txBody>
+      </p:sp>
+      <p:sp>
+        <p:nvSpPr>
+          <p:cNvPr id="12" name="CardHead1"/>
           <p:cNvSpPr txBox="1"/>
           <p:nvPr/>
         </p:nvSpPr>
         <p:spPr>
           <a:xfrm>
-            <a:off x="4636008" y="3931920"/>
-            <a:ext cx="2935224" cy="1417320"/>
+            <a:off x="4617720" y="3072384"/>
+            <a:ext cx="2971800" cy="685800"/>
           </a:xfrm>
           <a:prstGeom prst="rect">
             <a:avLst/>
@@ -10397,17 +10409,59 @@
           <a:ln/>
         </p:spPr>
         <p:txBody>
-          <a:bodyPr wrap="square" lIns="0" tIns="0" rIns="0" bIns="0" rtlCol="0" anchor="ctr"/>
+          <a:bodyPr wrap="square" lIns="0" tIns="0" rIns="0" bIns="0" rtlCol="0" anchor="t"/>
           <a:lstStyle/>
           <a:p>
             <a:pPr marL="0" indent="0">
               <a:lnSpc>
-                <a:spcPct val="130000"/>
+                <a:spcPct val="112000"/>
               </a:lnSpc>
               <a:buNone/>
             </a:pPr>
             <a:r>
-              <a:rPr lang="en-US" sz="1300" dirty="0">
+              <a:rPr lang="en-US" sz="1600" b="1" dirty="0">
+                <a:solidFill>
+                  <a:srgbClr val="21295C"/>
+                </a:solidFill>
+                <a:latin typeface="Cambria" pitchFamily="34" charset="0"/>
+                <a:ea typeface="Cambria" pitchFamily="34" charset="-122"/>
+                <a:cs typeface="Cambria" pitchFamily="34" charset="-120"/>
+              </a:rPr>
+              <a:t>Semantics that drift</a:t>
+            </a:r>
+            <a:endParaRPr lang="en-US" sz="1600" dirty="0"/>
+          </a:p>
+        </p:txBody>
+      </p:sp>
+      <p:sp>
+        <p:nvSpPr>
+          <p:cNvPr id="13" name="CardBody1"/>
+          <p:cNvSpPr txBox="1"/>
+          <p:nvPr/>
+        </p:nvSpPr>
+        <p:spPr>
+          <a:xfrm>
+            <a:off x="4617720" y="3862704"/>
+            <a:ext cx="2971800" cy="1280160"/>
+          </a:xfrm>
+          <a:prstGeom prst="rect">
+            <a:avLst/>
+          </a:prstGeom>
+          <a:noFill/>
+          <a:ln/>
+        </p:spPr>
+        <p:txBody>
+          <a:bodyPr wrap="square" lIns="0" tIns="0" rIns="0" bIns="0" rtlCol="0" anchor="t"/>
+          <a:lstStyle/>
+          <a:p>
+            <a:pPr marL="0" indent="0">
+              <a:lnSpc>
+                <a:spcPct val="128000"/>
+              </a:lnSpc>
+              <a:buNone/>
+            </a:pPr>
+            <a:r>
+              <a:rPr lang="en-US" sz="1200" dirty="0">
                 <a:solidFill>
                   <a:srgbClr val="5C6B85"/>
                 </a:solidFill>
@@ -10415,22 +10469,22 @@
                 <a:ea typeface="Calibri" pitchFamily="34" charset="-122"/>
                 <a:cs typeface="Calibri" pitchFamily="34" charset="-120"/>
               </a:rPr>
-              <a:t>Your team's stack changes. Ibis code mostly doesn't have to.</a:t>
-            </a:r>
-            <a:endParaRPr lang="en-US" sz="1300" dirty="0"/>
-          </a:p>
-        </p:txBody>
-      </p:sp>
-      <p:sp>
-        <p:nvSpPr>
-          <p:cNvPr id="14" name="Shape 10"/>
+              <a:t>NULL sort position, integer division, timestamp precision and time zones, regex flavor, string case handling. The query runs; the answer can shift between engines.</a:t>
+            </a:r>
+            <a:endParaRPr lang="en-US" sz="1200" dirty="0"/>
+          </a:p>
+        </p:txBody>
+      </p:sp>
+      <p:sp>
+        <p:nvSpPr>
+          <p:cNvPr id="14" name="Card 14"/>
           <p:cNvSpPr/>
           <p:nvPr/>
         </p:nvSpPr>
         <p:spPr>
           <a:xfrm>
             <a:off x="8138160" y="1965960"/>
-            <a:ext cx="3520440" cy="3566160"/>
+            <a:ext cx="3520440" cy="3200400"/>
           </a:xfrm>
           <a:prstGeom prst="roundRect">
             <a:avLst>
@@ -10452,7 +10506,7 @@
       </p:sp>
       <p:sp>
         <p:nvSpPr>
-          <p:cNvPr id="15" name="Shape 11"/>
+          <p:cNvPr id="15" name="Badge 3"/>
           <p:cNvSpPr/>
           <p:nvPr/>
         </p:nvSpPr>
@@ -10477,40 +10531,16 @@
           </a:p>
         </p:txBody>
       </p:sp>
-      <p:pic>
-        <p:nvPicPr>
-          <p:cNvPr id="16" name="Image 2" descr="/home/claude/ibis-talk/icons/check.png"/>
-          <p:cNvPicPr>
-            <a:picLocks noChangeAspect="1"/>
-          </p:cNvPicPr>
-          <p:nvPr/>
-        </p:nvPicPr>
-        <p:blipFill>
-          <a:blip r:embed="rId5"/>
-          <a:stretch>
-            <a:fillRect/>
-          </a:stretch>
-        </p:blipFill>
-        <p:spPr>
-          <a:xfrm>
-            <a:off x="8498799" y="2326599"/>
-            <a:ext cx="430865" cy="430865"/>
-          </a:xfrm>
-          <a:prstGeom prst="rect">
-            <a:avLst/>
-          </a:prstGeom>
-        </p:spPr>
-      </p:pic>
-      <p:sp>
-        <p:nvSpPr>
-          <p:cNvPr id="17" name="Text 12"/>
+      <p:sp>
+        <p:nvSpPr>
+          <p:cNvPr id="16" name="BadgeNum 3"/>
           <p:cNvSpPr txBox="1"/>
           <p:nvPr/>
         </p:nvSpPr>
         <p:spPr>
           <a:xfrm>
-            <a:off x="8430768" y="3063240"/>
-            <a:ext cx="2935224" cy="868680"/>
+            <a:off x="8430768" y="2258568"/>
+            <a:ext cx="566928" cy="566928"/>
           </a:xfrm>
           <a:prstGeom prst="rect">
             <a:avLst/>
@@ -10522,37 +10552,34 @@
           <a:bodyPr wrap="square" lIns="0" tIns="0" rIns="0" bIns="0" rtlCol="0" anchor="ctr"/>
           <a:lstStyle/>
           <a:p>
-            <a:pPr marL="0" indent="0">
-              <a:lnSpc>
-                <a:spcPct val="115000"/>
-              </a:lnSpc>
-              <a:buNone/>
-            </a:pPr>
-            <a:r>
-              <a:rPr lang="en-US" sz="1650" b="1" dirty="0">
-                <a:solidFill>
-                  <a:srgbClr val="21295C"/>
+            <a:pPr marL="0" indent="0" algn="ctr">
+              <a:buNone/>
+            </a:pPr>
+            <a:r>
+              <a:rPr lang="en-US" sz="2000" b="1" dirty="0">
+                <a:solidFill>
+                  <a:srgbClr val="FFFFFF"/>
                 </a:solidFill>
                 <a:latin typeface="Cambria" pitchFamily="34" charset="0"/>
                 <a:ea typeface="Cambria" pitchFamily="34" charset="-122"/>
                 <a:cs typeface="Cambria" pitchFamily="34" charset="-120"/>
               </a:rPr>
-              <a:t>One skill, every employer's stack</a:t>
-            </a:r>
-            <a:endParaRPr lang="en-US" sz="1650" dirty="0"/>
-          </a:p>
-        </p:txBody>
-      </p:sp>
-      <p:sp>
-        <p:nvSpPr>
-          <p:cNvPr id="18" name="Text 13"/>
+              <a:t>3</a:t>
+            </a:r>
+            <a:endParaRPr lang="en-US" sz="2000" dirty="0"/>
+          </a:p>
+        </p:txBody>
+      </p:sp>
+      <p:sp>
+        <p:nvSpPr>
+          <p:cNvPr id="17" name="CardHead2"/>
           <p:cNvSpPr txBox="1"/>
           <p:nvPr/>
         </p:nvSpPr>
         <p:spPr>
           <a:xfrm>
-            <a:off x="8430768" y="3931920"/>
-            <a:ext cx="2935224" cy="1417320"/>
+            <a:off x="8412480" y="3072384"/>
+            <a:ext cx="2971800" cy="685800"/>
           </a:xfrm>
           <a:prstGeom prst="rect">
             <a:avLst/>
@@ -10561,17 +10588,70 @@
           <a:ln/>
         </p:spPr>
         <p:txBody>
-          <a:bodyPr wrap="square" lIns="0" tIns="0" rIns="0" bIns="0" rtlCol="0" anchor="ctr"/>
+          <a:bodyPr wrap="square" lIns="0" tIns="0" rIns="0" bIns="0" rtlCol="0" anchor="t"/>
           <a:lstStyle/>
           <a:p>
             <a:pPr marL="0" indent="0">
               <a:lnSpc>
-                <a:spcPct val="130000"/>
+                <a:spcPct val="112000"/>
               </a:lnSpc>
               <a:buNone/>
             </a:pPr>
             <a:r>
-              <a:rPr lang="en-US" sz="1300" dirty="0">
+              <a:rPr lang="en-US" sz="1600" b="1" dirty="0">
+                <a:solidFill>
+                  <a:srgbClr val="21295C"/>
+                </a:solidFill>
+                <a:latin typeface="Cambria" pitchFamily="34" charset="0"/>
+                <a:ea typeface="Cambria" pitchFamily="34" charset="-122"/>
+                <a:cs typeface="Cambria" pitchFamily="34" charset="-120"/>
+              </a:rPr>
+              <a:t>Getting data in and out</a:t>
+            </a:r>
+            <a:endParaRPr lang="en-US" sz="1600" dirty="0"/>
+          </a:p>
+        </p:txBody>
+      </p:sp>
+      <p:sp>
+        <p:nvSpPr>
+          <p:cNvPr id="18" name="CardBody2"/>
+          <p:cNvSpPr txBox="1"/>
+          <p:nvPr/>
+        </p:nvSpPr>
+        <p:spPr>
+          <a:xfrm>
+            <a:off x="8412480" y="3862704"/>
+            <a:ext cx="2971800" cy="1280160"/>
+          </a:xfrm>
+          <a:prstGeom prst="rect">
+            <a:avLst/>
+          </a:prstGeom>
+          <a:noFill/>
+          <a:ln/>
+        </p:spPr>
+        <p:txBody>
+          <a:bodyPr wrap="square" lIns="0" tIns="0" rIns="0" bIns="0" rtlCol="0" anchor="t"/>
+          <a:lstStyle/>
+          <a:p>
+            <a:pPr marL="0" indent="0">
+              <a:lnSpc>
+                <a:spcPct val="128000"/>
+              </a:lnSpc>
+              <a:buNone/>
+            </a:pPr>
+            <a:r>
+              <a:rPr lang="en-US" sz="1200" dirty="0">
+                <a:solidFill>
+                  <a:srgbClr val="5C6B85"/>
+                </a:solidFill>
+                <a:latin typeface="Courier New" pitchFamily="34" charset="0"/>
+                <a:ea typeface="Courier New" pitchFamily="34" charset="-122"/>
+                <a:cs typeface="Courier New" pitchFamily="34" charset="-120"/>
+              </a:rPr>
+              <a:t>read_parquet</a:t>
+            </a:r>
+            <a:r>
+              <a:rPr lang="en-US" sz="1200" dirty="0">
                 <a:solidFill>
                   <a:srgbClr val="5C6B85"/>
                 </a:solidFill>
@@ -10579,45 +10659,106 @@
                 <a:ea typeface="Calibri" pitchFamily="34" charset="-122"/>
                 <a:cs typeface="Calibri" pitchFamily="34" charset="-120"/>
               </a:rPr>
-              <a:t>Whatever warehouse or engine your next job runs, there's a good chance Ibis already speaks to it.</a:t>
-            </a:r>
-            <a:endParaRPr lang="en-US" sz="1300" dirty="0"/>
-          </a:p>
-        </p:txBody>
-      </p:sp>
-      <p:sp>
-        <p:nvSpPr>
-          <p:cNvPr id="19" name="Text 14"/>
-          <p:cNvSpPr txBox="1"/>
-          <p:nvPr/>
-        </p:nvSpPr>
-        <p:spPr>
-          <a:xfrm>
-            <a:off x="548640" y="6473952"/>
-            <a:ext cx="7315200" cy="274320"/>
-          </a:xfrm>
-          <a:prstGeom prst="rect">
-            <a:avLst/>
-          </a:prstGeom>
-          <a:noFill/>
-          <a:ln/>
-        </p:spPr>
-        <p:txBody>
-          <a:bodyPr wrap="square" lIns="0" tIns="0" rIns="0" bIns="0" rtlCol="0" anchor="ctr"/>
-          <a:lstStyle/>
-          <a:p>
-            <a:pPr marL="0" indent="0">
-              <a:buNone/>
-            </a:pPr>
-            <a:r>
-              <a:rPr lang="en-US" sz="900" dirty="0">
-                <a:solidFill>
-                  <a:srgbClr val="9AA6BD"/>
+              <a:t>, </a:t>
+            </a:r>
+            <a:r>
+              <a:rPr lang="en-US" sz="1200" dirty="0">
+                <a:solidFill>
+                  <a:srgbClr val="5C6B85"/>
+                </a:solidFill>
+                <a:latin typeface="Courier New" pitchFamily="34" charset="0"/>
+                <a:ea typeface="Courier New" pitchFamily="34" charset="-122"/>
+                <a:cs typeface="Courier New" pitchFamily="34" charset="-120"/>
+              </a:rPr>
+              <a:t>create_table</a:t>
+            </a:r>
+            <a:r>
+              <a:rPr lang="en-US" sz="1200" dirty="0">
+                <a:solidFill>
+                  <a:srgbClr val="5C6B85"/>
                 </a:solidFill>
                 <a:latin typeface="Calibri" pitchFamily="34" charset="0"/>
                 <a:ea typeface="Calibri" pitchFamily="34" charset="-122"/>
                 <a:cs typeface="Calibri" pitchFamily="34" charset="-120"/>
               </a:rPr>
+              <a:t>, and file I/O are supported unevenly. Composing expressions is the portable part; loading and writing is less so.</a:t>
+            </a:r>
+            <a:endParaRPr lang="en-US" sz="1200" dirty="0"/>
+          </a:p>
+        </p:txBody>
+      </p:sp>
+      <p:sp>
+        <p:nvSpPr>
+          <p:cNvPr id="19" name="Footnote"/>
+          <p:cNvSpPr txBox="1"/>
+          <p:nvPr/>
+        </p:nvSpPr>
+        <p:spPr>
+          <a:xfrm>
+            <a:off x="548640" y="5560000"/>
+            <a:ext cx="11094720" cy="560000"/>
+          </a:xfrm>
+          <a:prstGeom prst="rect">
+            <a:avLst/>
+          </a:prstGeom>
+          <a:noFill/>
+          <a:ln/>
+        </p:spPr>
+        <p:txBody>
+          <a:bodyPr wrap="square" lIns="0" tIns="0" rIns="0" bIns="0" rtlCol="0" anchor="ctr"/>
+          <a:lstStyle/>
+          <a:p>
+            <a:pPr marL="0" indent="0">
+              <a:buNone/>
+            </a:pPr>
+            <a:r>
+              <a:rPr lang="en-US" sz="1550" i="1" dirty="0">
+                <a:solidFill>
+                  <a:srgbClr val="21295C"/>
+                </a:solidFill>
+                <a:latin typeface="Calibri" pitchFamily="34" charset="0"/>
+                <a:ea typeface="Calibri" pitchFamily="34" charset="-122"/>
+                <a:cs typeface="Calibri" pitchFamily="34" charset="-120"/>
+              </a:rPr>
+              <a:t>Portability is real — treat a backend swap like a database migration, and run your tests against the new engine first.</a:t>
+            </a:r>
+            <a:endParaRPr lang="en-US" sz="1550" dirty="0"/>
+          </a:p>
+        </p:txBody>
+      </p:sp>
+      <p:sp>
+        <p:nvSpPr>
+          <p:cNvPr id="20" name="FooterL"/>
+          <p:cNvSpPr txBox="1"/>
+          <p:nvPr/>
+        </p:nvSpPr>
+        <p:spPr>
+          <a:xfrm>
+            <a:off x="548640" y="6473952"/>
+            <a:ext cx="7315200" cy="274320"/>
+          </a:xfrm>
+          <a:prstGeom prst="rect">
+            <a:avLst/>
+          </a:prstGeom>
+          <a:noFill/>
+          <a:ln/>
+        </p:spPr>
+        <p:txBody>
+          <a:bodyPr wrap="square" lIns="0" tIns="0" rIns="0" bIns="0" rtlCol="0" anchor="ctr"/>
+          <a:lstStyle/>
+          <a:p>
+            <a:pPr marL="0" indent="0">
+              <a:buNone/>
+            </a:pPr>
+            <a:r>
+              <a:rPr lang="en-US" sz="900" dirty="0">
+                <a:solidFill>
+                  <a:srgbClr val="9AA6BD"/>
+                </a:solidFill>
+                <a:latin typeface="Calibri" pitchFamily="34" charset="0"/>
+                <a:ea typeface="Calibri" pitchFamily="34" charset="-122"/>
+                <a:cs typeface="Calibri" pitchFamily="34" charset="-120"/>
+              </a:rPr>
               <a:t>Ibis: Bringing Optionality to Python Dataframes</a:t>
             </a:r>
             <a:endParaRPr lang="en-US" sz="900" dirty="0"/>
@@ -10626,7 +10767,7 @@
       </p:sp>
       <p:sp>
         <p:nvSpPr>
-          <p:cNvPr id="20" name="Text 15"/>
+          <p:cNvPr id="21" name="FooterR"/>
           <p:cNvSpPr txBox="1"/>
           <p:nvPr/>
         </p:nvSpPr>
@@ -10673,7 +10814,7 @@
 
 <file path=ppt/slides/slide19.xml><?xml version="1.0" encoding="utf-8"?>
 <p:sld xmlns:a="http://schemas.openxmlformats.org/drawingml/2006/main" xmlns:r="http://schemas.openxmlformats.org/officeDocument/2006/relationships" xmlns:p="http://schemas.openxmlformats.org/presentationml/2006/main">
-  <p:cSld name="Slide 19">
+  <p:cSld name="Slide 22">
     <p:bg>
       <p:bgPr>
         <a:solidFill>
@@ -10698,7 +10839,7 @@
       </p:grpSpPr>
       <p:sp>
         <p:nvSpPr>
-          <p:cNvPr id="2" name="Text 0"/>
+          <p:cNvPr id="2" name="Eyebrow"/>
           <p:cNvSpPr txBox="1"/>
           <p:nvPr/>
         </p:nvSpPr>
@@ -10729,7 +10870,7 @@
                 <a:ea typeface="Calibri" pitchFamily="34" charset="-122"/>
                 <a:cs typeface="Calibri" pitchFamily="34" charset="-120"/>
               </a:rPr>
-              <a:t>FOLLOW ALONG</a:t>
+              <a:t>THE FINE PRINT · UDFs</a:t>
             </a:r>
             <a:endParaRPr lang="en-US" sz="1300" dirty="0"/>
           </a:p>
@@ -10737,14 +10878,14 @@
       </p:sp>
       <p:sp>
         <p:nvSpPr>
-          <p:cNvPr id="3" name="Text 1"/>
+          <p:cNvPr id="3" name="Title"/>
           <p:cNvSpPr txBox="1"/>
           <p:nvPr/>
         </p:nvSpPr>
         <p:spPr>
           <a:xfrm>
             <a:off x="548640" y="777240"/>
-            <a:ext cx="9601200" cy="822960"/>
+            <a:ext cx="10500000" cy="822960"/>
           </a:xfrm>
           <a:prstGeom prst="rect">
             <a:avLst/>
@@ -10768,7 +10909,7 @@
                 <a:ea typeface="Cambria" pitchFamily="34" charset="-122"/>
                 <a:cs typeface="Cambria" pitchFamily="34" charset="-120"/>
               </a:rPr>
-              <a:t>Run this exact demo yourself, tonight or next week</a:t>
+              <a:t>UDFs don’t travel between backends for free</a:t>
             </a:r>
             <a:endParaRPr lang="en-US" sz="3200" dirty="0"/>
           </a:p>
@@ -10776,20 +10917,49 @@
       </p:sp>
       <p:sp>
         <p:nvSpPr>
-          <p:cNvPr id="4" name="Shape 2"/>
+          <p:cNvPr id="4" name="Card 4"/>
           <p:cNvSpPr/>
           <p:nvPr/>
         </p:nvSpPr>
         <p:spPr>
           <a:xfrm>
-            <a:off x="548640" y="1920240"/>
-            <a:ext cx="512064" cy="512064"/>
+            <a:off x="548640" y="1965960"/>
+            <a:ext cx="3520440" cy="3200400"/>
+          </a:xfrm>
+          <a:prstGeom prst="roundRect">
+            <a:avLst>
+              <a:gd name="adj" fmla="val 2597"/>
+            </a:avLst>
+          </a:prstGeom>
+          <a:solidFill>
+            <a:srgbClr val="EEF3F7"/>
+          </a:solidFill>
+          <a:ln/>
+        </p:spPr>
+        <p:txBody>
+          <a:bodyPr/>
+          <a:lstStyle/>
+          <a:p>
+            <a:endParaRPr lang="en-US"/>
+          </a:p>
+        </p:txBody>
+      </p:sp>
+      <p:sp>
+        <p:nvSpPr>
+          <p:cNvPr id="5" name="Badge 1"/>
+          <p:cNvSpPr/>
+          <p:nvPr/>
+        </p:nvSpPr>
+        <p:spPr>
+          <a:xfrm>
+            <a:off x="841248" y="2258568"/>
+            <a:ext cx="566928" cy="566928"/>
           </a:xfrm>
           <a:prstGeom prst="ellipse">
             <a:avLst/>
           </a:prstGeom>
           <a:solidFill>
-            <a:srgbClr val="1C7293"/>
+            <a:srgbClr val="065A82"/>
           </a:solidFill>
           <a:ln/>
         </p:spPr>
@@ -10801,40 +10971,16 @@
           </a:p>
         </p:txBody>
       </p:sp>
-      <p:pic>
-        <p:nvPicPr>
-          <p:cNvPr id="5" name="Image 0" descr="/home/claude/ibis-talk/icons/laptop.png"/>
-          <p:cNvPicPr>
-            <a:picLocks noChangeAspect="1"/>
-          </p:cNvPicPr>
-          <p:nvPr/>
-        </p:nvPicPr>
-        <p:blipFill>
-          <a:blip r:embed="rId3"/>
-          <a:stretch>
-            <a:fillRect/>
-          </a:stretch>
-        </p:blipFill>
-        <p:spPr>
-          <a:xfrm>
-            <a:off x="610088" y="1981688"/>
-            <a:ext cx="389169" cy="389169"/>
-          </a:xfrm>
-          <a:prstGeom prst="rect">
-            <a:avLst/>
-          </a:prstGeom>
-        </p:spPr>
-      </p:pic>
-      <p:sp>
-        <p:nvSpPr>
-          <p:cNvPr id="6" name="Text 3"/>
+      <p:sp>
+        <p:nvSpPr>
+          <p:cNvPr id="6" name="BadgeNum 1"/>
           <p:cNvSpPr txBox="1"/>
           <p:nvPr/>
         </p:nvSpPr>
         <p:spPr>
           <a:xfrm>
-            <a:off x="1234440" y="1892808"/>
-            <a:ext cx="3749040" cy="548640"/>
+            <a:off x="841248" y="2258568"/>
+            <a:ext cx="566928" cy="566928"/>
           </a:xfrm>
           <a:prstGeom prst="rect">
             <a:avLst/>
@@ -10846,34 +10992,174 @@
           <a:bodyPr wrap="square" lIns="0" tIns="0" rIns="0" bIns="0" rtlCol="0" anchor="ctr"/>
           <a:lstStyle/>
           <a:p>
+            <a:pPr marL="0" indent="0" algn="ctr">
+              <a:buNone/>
+            </a:pPr>
+            <a:r>
+              <a:rPr lang="en-US" sz="2000" b="1" dirty="0">
+                <a:solidFill>
+                  <a:srgbClr val="FFFFFF"/>
+                </a:solidFill>
+                <a:latin typeface="Cambria" pitchFamily="34" charset="0"/>
+                <a:ea typeface="Cambria" pitchFamily="34" charset="-122"/>
+                <a:cs typeface="Cambria" pitchFamily="34" charset="-120"/>
+              </a:rPr>
+              <a:t>1</a:t>
+            </a:r>
+            <a:endParaRPr lang="en-US" sz="2000" dirty="0"/>
+          </a:p>
+        </p:txBody>
+      </p:sp>
+      <p:sp>
+        <p:nvSpPr>
+          <p:cNvPr id="7" name="CardHead0"/>
+          <p:cNvSpPr txBox="1"/>
+          <p:nvPr/>
+        </p:nvSpPr>
+        <p:spPr>
+          <a:xfrm>
+            <a:off x="822960" y="3072384"/>
+            <a:ext cx="2971800" cy="685800"/>
+          </a:xfrm>
+          <a:prstGeom prst="rect">
+            <a:avLst/>
+          </a:prstGeom>
+          <a:noFill/>
+          <a:ln/>
+        </p:spPr>
+        <p:txBody>
+          <a:bodyPr wrap="square" lIns="0" tIns="0" rIns="0" bIns="0" rtlCol="0" anchor="t"/>
+          <a:lstStyle/>
+          <a:p>
             <a:pPr marL="0" indent="0">
-              <a:buNone/>
-            </a:pPr>
-            <a:r>
-              <a:rPr lang="en-US" sz="1550" b="1" dirty="0">
-                <a:solidFill>
-                  <a:srgbClr val="21295C"/>
+              <a:lnSpc>
+                <a:spcPct val="112000"/>
+              </a:lnSpc>
+              <a:buNone/>
+            </a:pPr>
+            <a:r>
+              <a:rPr lang="en-US" sz="1600" b="1" dirty="0">
+                <a:solidFill>
+                  <a:srgbClr val="065A82"/>
+                </a:solidFill>
+                <a:latin typeface="Courier New" pitchFamily="34" charset="0"/>
+                <a:ea typeface="Courier New" pitchFamily="34" charset="-122"/>
+                <a:cs typeface="Courier New" pitchFamily="34" charset="-120"/>
+              </a:rPr>
+              <a:t>scalar.python</a:t>
+            </a:r>
+            <a:endParaRPr lang="en-US" sz="1600" dirty="0"/>
+          </a:p>
+        </p:txBody>
+      </p:sp>
+      <p:sp>
+        <p:nvSpPr>
+          <p:cNvPr id="8" name="CardBody0"/>
+          <p:cNvSpPr txBox="1"/>
+          <p:nvPr/>
+        </p:nvSpPr>
+        <p:spPr>
+          <a:xfrm>
+            <a:off x="822960" y="3862704"/>
+            <a:ext cx="2971800" cy="1280160"/>
+          </a:xfrm>
+          <a:prstGeom prst="rect">
+            <a:avLst/>
+          </a:prstGeom>
+          <a:noFill/>
+          <a:ln/>
+        </p:spPr>
+        <p:txBody>
+          <a:bodyPr wrap="square" lIns="0" tIns="0" rIns="0" bIns="0" rtlCol="0" anchor="t"/>
+          <a:lstStyle/>
+          <a:p>
+            <a:pPr marL="0" indent="0">
+              <a:lnSpc>
+                <a:spcPct val="128000"/>
+              </a:lnSpc>
+              <a:buNone/>
+            </a:pPr>
+            <a:r>
+              <a:rPr lang="en-US" sz="1200" dirty="0">
+                <a:solidFill>
+                  <a:srgbClr val="5C6B85"/>
                 </a:solidFill>
                 <a:latin typeface="Calibri" pitchFamily="34" charset="0"/>
                 <a:ea typeface="Calibri" pitchFamily="34" charset="-122"/>
                 <a:cs typeface="Calibri" pitchFamily="34" charset="-120"/>
               </a:rPr>
-              <a:t>1. Clone the repo &amp; install</a:t>
-            </a:r>
-            <a:endParaRPr lang="en-US" sz="1550" dirty="0"/>
-          </a:p>
-        </p:txBody>
-      </p:sp>
-      <p:sp>
-        <p:nvSpPr>
-          <p:cNvPr id="7" name="Text 4"/>
+              <a:t>Row-at-a-time Python. Fine on DuckDB, Polars, pandas. Elsewhere support and speed vary widely — several SQL engines, Trino included, have no Python-UDF path at all.</a:t>
+            </a:r>
+            <a:endParaRPr lang="en-US" sz="1200" dirty="0"/>
+          </a:p>
+        </p:txBody>
+      </p:sp>
+      <p:sp>
+        <p:nvSpPr>
+          <p:cNvPr id="9" name="Card 9"/>
+          <p:cNvSpPr/>
+          <p:nvPr/>
+        </p:nvSpPr>
+        <p:spPr>
+          <a:xfrm>
+            <a:off x="4343400" y="1965960"/>
+            <a:ext cx="3520440" cy="3200400"/>
+          </a:xfrm>
+          <a:prstGeom prst="roundRect">
+            <a:avLst>
+              <a:gd name="adj" fmla="val 2597"/>
+            </a:avLst>
+          </a:prstGeom>
+          <a:solidFill>
+            <a:srgbClr val="EEF3F7"/>
+          </a:solidFill>
+          <a:ln/>
+        </p:spPr>
+        <p:txBody>
+          <a:bodyPr/>
+          <a:lstStyle/>
+          <a:p>
+            <a:endParaRPr lang="en-US"/>
+          </a:p>
+        </p:txBody>
+      </p:sp>
+      <p:sp>
+        <p:nvSpPr>
+          <p:cNvPr id="10" name="Badge 2"/>
+          <p:cNvSpPr/>
+          <p:nvPr/>
+        </p:nvSpPr>
+        <p:spPr>
+          <a:xfrm>
+            <a:off x="4636008" y="2258568"/>
+            <a:ext cx="566928" cy="566928"/>
+          </a:xfrm>
+          <a:prstGeom prst="ellipse">
+            <a:avLst/>
+          </a:prstGeom>
+          <a:solidFill>
+            <a:srgbClr val="065A82"/>
+          </a:solidFill>
+          <a:ln/>
+        </p:spPr>
+        <p:txBody>
+          <a:bodyPr/>
+          <a:lstStyle/>
+          <a:p>
+            <a:endParaRPr lang="en-US"/>
+          </a:p>
+        </p:txBody>
+      </p:sp>
+      <p:sp>
+        <p:nvSpPr>
+          <p:cNvPr id="11" name="BadgeNum 2"/>
           <p:cNvSpPr txBox="1"/>
           <p:nvPr/>
         </p:nvSpPr>
         <p:spPr>
           <a:xfrm>
-            <a:off x="5120640" y="1892808"/>
-            <a:ext cx="6492240" cy="548640"/>
+            <a:off x="4636008" y="2258568"/>
+            <a:ext cx="566928" cy="566928"/>
           </a:xfrm>
           <a:prstGeom prst="rect">
             <a:avLst/>
@@ -10885,85 +11171,76 @@
           <a:bodyPr wrap="square" lIns="0" tIns="0" rIns="0" bIns="0" rtlCol="0" anchor="ctr"/>
           <a:lstStyle/>
           <a:p>
+            <a:pPr marL="0" indent="0" algn="ctr">
+              <a:buNone/>
+            </a:pPr>
+            <a:r>
+              <a:rPr lang="en-US" sz="2000" b="1" dirty="0">
+                <a:solidFill>
+                  <a:srgbClr val="FFFFFF"/>
+                </a:solidFill>
+                <a:latin typeface="Cambria" pitchFamily="34" charset="0"/>
+                <a:ea typeface="Cambria" pitchFamily="34" charset="-122"/>
+                <a:cs typeface="Cambria" pitchFamily="34" charset="-120"/>
+              </a:rPr>
+              <a:t>2</a:t>
+            </a:r>
+            <a:endParaRPr lang="en-US" sz="2000" dirty="0"/>
+          </a:p>
+        </p:txBody>
+      </p:sp>
+      <p:sp>
+        <p:nvSpPr>
+          <p:cNvPr id="12" name="CardHead1"/>
+          <p:cNvSpPr txBox="1"/>
+          <p:nvPr/>
+        </p:nvSpPr>
+        <p:spPr>
+          <a:xfrm>
+            <a:off x="4617720" y="3072384"/>
+            <a:ext cx="2971800" cy="685800"/>
+          </a:xfrm>
+          <a:prstGeom prst="rect">
+            <a:avLst/>
+          </a:prstGeom>
+          <a:noFill/>
+          <a:ln/>
+        </p:spPr>
+        <p:txBody>
+          <a:bodyPr wrap="square" lIns="0" tIns="0" rIns="0" bIns="0" rtlCol="0" anchor="t"/>
+          <a:lstStyle/>
+          <a:p>
             <a:pPr marL="0" indent="0">
-              <a:buNone/>
-            </a:pPr>
-            <a:r>
-              <a:rPr lang="en-US" sz="1300" dirty="0">
-                <a:solidFill>
-                  <a:srgbClr val="5C6B85"/>
+              <a:lnSpc>
+                <a:spcPct val="112000"/>
+              </a:lnSpc>
+              <a:buNone/>
+            </a:pPr>
+            <a:r>
+              <a:rPr lang="en-US" sz="1600" b="1" dirty="0">
+                <a:solidFill>
+                  <a:srgbClr val="065A82"/>
                 </a:solidFill>
                 <a:latin typeface="Courier New" pitchFamily="34" charset="0"/>
                 <a:ea typeface="Courier New" pitchFamily="34" charset="-122"/>
                 <a:cs typeface="Courier New" pitchFamily="34" charset="-120"/>
               </a:rPr>
-              <a:t>pip install -r requirements.txt</a:t>
-            </a:r>
-            <a:endParaRPr lang="en-US" sz="1300" dirty="0"/>
-          </a:p>
-        </p:txBody>
-      </p:sp>
-      <p:sp>
-        <p:nvSpPr>
-          <p:cNvPr id="8" name="Shape 5"/>
-          <p:cNvSpPr/>
-          <p:nvPr/>
-        </p:nvSpPr>
-        <p:spPr>
-          <a:xfrm>
-            <a:off x="548640" y="2926080"/>
-            <a:ext cx="512064" cy="512064"/>
-          </a:xfrm>
-          <a:prstGeom prst="ellipse">
-            <a:avLst/>
-          </a:prstGeom>
-          <a:solidFill>
-            <a:srgbClr val="1C7293"/>
-          </a:solidFill>
-          <a:ln/>
-        </p:spPr>
-        <p:txBody>
-          <a:bodyPr/>
-          <a:lstStyle/>
-          <a:p>
-            <a:endParaRPr lang="en-US"/>
-          </a:p>
-        </p:txBody>
-      </p:sp>
-      <p:pic>
-        <p:nvPicPr>
-          <p:cNvPr id="9" name="Image 1" descr="/home/claude/ibis-talk/icons/database.png"/>
-          <p:cNvPicPr>
-            <a:picLocks noChangeAspect="1"/>
-          </p:cNvPicPr>
-          <p:nvPr/>
-        </p:nvPicPr>
-        <p:blipFill>
-          <a:blip r:embed="rId4"/>
-          <a:stretch>
-            <a:fillRect/>
-          </a:stretch>
-        </p:blipFill>
-        <p:spPr>
-          <a:xfrm>
-            <a:off x="610088" y="2987528"/>
-            <a:ext cx="389169" cy="389169"/>
-          </a:xfrm>
-          <a:prstGeom prst="rect">
-            <a:avLst/>
-          </a:prstGeom>
-        </p:spPr>
-      </p:pic>
-      <p:sp>
-        <p:nvSpPr>
-          <p:cNvPr id="10" name="Text 6"/>
+              <a:t>scalar.builtin</a:t>
+            </a:r>
+            <a:endParaRPr lang="en-US" sz="1600" dirty="0"/>
+          </a:p>
+        </p:txBody>
+      </p:sp>
+      <p:sp>
+        <p:nvSpPr>
+          <p:cNvPr id="13" name="CardBody1"/>
           <p:cNvSpPr txBox="1"/>
           <p:nvPr/>
         </p:nvSpPr>
         <p:spPr>
           <a:xfrm>
-            <a:off x="1234440" y="2898648"/>
-            <a:ext cx="3749040" cy="548640"/>
+            <a:off x="4617720" y="3862704"/>
+            <a:ext cx="2971800" cy="1280160"/>
           </a:xfrm>
           <a:prstGeom prst="rect">
             <a:avLst/>
@@ -10972,37 +11249,96 @@
           <a:ln/>
         </p:spPr>
         <p:txBody>
-          <a:bodyPr wrap="square" lIns="0" tIns="0" rIns="0" bIns="0" rtlCol="0" anchor="ctr"/>
+          <a:bodyPr wrap="square" lIns="0" tIns="0" rIns="0" bIns="0" rtlCol="0" anchor="t"/>
           <a:lstStyle/>
           <a:p>
             <a:pPr marL="0" indent="0">
-              <a:buNone/>
-            </a:pPr>
-            <a:r>
-              <a:rPr lang="en-US" sz="1550" b="1" dirty="0">
-                <a:solidFill>
-                  <a:srgbClr val="21295C"/>
+              <a:lnSpc>
+                <a:spcPct val="128000"/>
+              </a:lnSpc>
+              <a:buNone/>
+            </a:pPr>
+            <a:r>
+              <a:rPr lang="en-US" sz="1200" dirty="0">
+                <a:solidFill>
+                  <a:srgbClr val="5C6B85"/>
                 </a:solidFill>
                 <a:latin typeface="Calibri" pitchFamily="34" charset="0"/>
                 <a:ea typeface="Calibri" pitchFamily="34" charset="-122"/>
                 <a:cs typeface="Calibri" pitchFamily="34" charset="-120"/>
               </a:rPr>
-              <a:t>2. Cache the demo dataset</a:t>
-            </a:r>
-            <a:endParaRPr lang="en-US" sz="1550" dirty="0"/>
-          </a:p>
-        </p:txBody>
-      </p:sp>
-      <p:sp>
-        <p:nvSpPr>
-          <p:cNvPr id="11" name="Text 7"/>
+              <a:t>Delegates to a function the backend already ships — fast and native, but that exact function has to exist, by name, on every backend you target.</a:t>
+            </a:r>
+            <a:endParaRPr lang="en-US" sz="1200" dirty="0"/>
+          </a:p>
+        </p:txBody>
+      </p:sp>
+      <p:sp>
+        <p:nvSpPr>
+          <p:cNvPr id="14" name="Card 14"/>
+          <p:cNvSpPr/>
+          <p:nvPr/>
+        </p:nvSpPr>
+        <p:spPr>
+          <a:xfrm>
+            <a:off x="8138160" y="1965960"/>
+            <a:ext cx="3520440" cy="3200400"/>
+          </a:xfrm>
+          <a:prstGeom prst="roundRect">
+            <a:avLst>
+              <a:gd name="adj" fmla="val 2597"/>
+            </a:avLst>
+          </a:prstGeom>
+          <a:solidFill>
+            <a:srgbClr val="EEF3F7"/>
+          </a:solidFill>
+          <a:ln/>
+        </p:spPr>
+        <p:txBody>
+          <a:bodyPr/>
+          <a:lstStyle/>
+          <a:p>
+            <a:endParaRPr lang="en-US"/>
+          </a:p>
+        </p:txBody>
+      </p:sp>
+      <p:sp>
+        <p:nvSpPr>
+          <p:cNvPr id="15" name="Badge 3"/>
+          <p:cNvSpPr/>
+          <p:nvPr/>
+        </p:nvSpPr>
+        <p:spPr>
+          <a:xfrm>
+            <a:off x="8430768" y="2258568"/>
+            <a:ext cx="566928" cy="566928"/>
+          </a:xfrm>
+          <a:prstGeom prst="ellipse">
+            <a:avLst/>
+          </a:prstGeom>
+          <a:solidFill>
+            <a:srgbClr val="065A82"/>
+          </a:solidFill>
+          <a:ln/>
+        </p:spPr>
+        <p:txBody>
+          <a:bodyPr/>
+          <a:lstStyle/>
+          <a:p>
+            <a:endParaRPr lang="en-US"/>
+          </a:p>
+        </p:txBody>
+      </p:sp>
+      <p:sp>
+        <p:nvSpPr>
+          <p:cNvPr id="16" name="BadgeNum 3"/>
           <p:cNvSpPr txBox="1"/>
           <p:nvPr/>
         </p:nvSpPr>
         <p:spPr>
           <a:xfrm>
-            <a:off x="5120640" y="2898648"/>
-            <a:ext cx="6492240" cy="548640"/>
+            <a:off x="8430768" y="2258568"/>
+            <a:ext cx="566928" cy="566928"/>
           </a:xfrm>
           <a:prstGeom prst="rect">
             <a:avLst/>
@@ -11014,124 +11350,118 @@
           <a:bodyPr wrap="square" lIns="0" tIns="0" rIns="0" bIns="0" rtlCol="0" anchor="ctr"/>
           <a:lstStyle/>
           <a:p>
+            <a:pPr marL="0" indent="0" algn="ctr">
+              <a:buNone/>
+            </a:pPr>
+            <a:r>
+              <a:rPr lang="en-US" sz="2000" b="1" dirty="0">
+                <a:solidFill>
+                  <a:srgbClr val="FFFFFF"/>
+                </a:solidFill>
+                <a:latin typeface="Cambria" pitchFamily="34" charset="0"/>
+                <a:ea typeface="Cambria" pitchFamily="34" charset="-122"/>
+                <a:cs typeface="Cambria" pitchFamily="34" charset="-120"/>
+              </a:rPr>
+              <a:t>3</a:t>
+            </a:r>
+            <a:endParaRPr lang="en-US" sz="2000" dirty="0"/>
+          </a:p>
+        </p:txBody>
+      </p:sp>
+      <p:sp>
+        <p:nvSpPr>
+          <p:cNvPr id="17" name="CardHead2"/>
+          <p:cNvSpPr txBox="1"/>
+          <p:nvPr/>
+        </p:nvSpPr>
+        <p:spPr>
+          <a:xfrm>
+            <a:off x="8412480" y="3072384"/>
+            <a:ext cx="2971800" cy="685800"/>
+          </a:xfrm>
+          <a:prstGeom prst="rect">
+            <a:avLst/>
+          </a:prstGeom>
+          <a:noFill/>
+          <a:ln/>
+        </p:spPr>
+        <p:txBody>
+          <a:bodyPr wrap="square" lIns="0" tIns="0" rIns="0" bIns="0" rtlCol="0" anchor="t"/>
+          <a:lstStyle/>
+          <a:p>
             <a:pPr marL="0" indent="0">
-              <a:buNone/>
-            </a:pPr>
-            <a:r>
-              <a:rPr lang="en-US" sz="1300" dirty="0">
+              <a:lnSpc>
+                <a:spcPct val="112000"/>
+              </a:lnSpc>
+              <a:buNone/>
+            </a:pPr>
+            <a:r>
+              <a:rPr lang="en-US" sz="1600" b="1" dirty="0">
+                <a:solidFill>
+                  <a:srgbClr val="21295C"/>
+                </a:solidFill>
+                <a:latin typeface="Cambria" pitchFamily="34" charset="0"/>
+                <a:ea typeface="Cambria" pitchFamily="34" charset="-122"/>
+                <a:cs typeface="Cambria" pitchFamily="34" charset="-120"/>
+              </a:rPr>
+              <a:t>Server-side UDFs</a:t>
+            </a:r>
+            <a:endParaRPr lang="en-US" sz="1600" dirty="0"/>
+          </a:p>
+        </p:txBody>
+      </p:sp>
+      <p:sp>
+        <p:nvSpPr>
+          <p:cNvPr id="18" name="CardBody2"/>
+          <p:cNvSpPr txBox="1"/>
+          <p:nvPr/>
+        </p:nvSpPr>
+        <p:spPr>
+          <a:xfrm>
+            <a:off x="8412480" y="3862704"/>
+            <a:ext cx="2971800" cy="1280160"/>
+          </a:xfrm>
+          <a:prstGeom prst="rect">
+            <a:avLst/>
+          </a:prstGeom>
+          <a:noFill/>
+          <a:ln/>
+        </p:spPr>
+        <p:txBody>
+          <a:bodyPr wrap="square" lIns="0" tIns="0" rIns="0" bIns="0" rtlCol="0" anchor="t"/>
+          <a:lstStyle/>
+          <a:p>
+            <a:pPr marL="0" indent="0">
+              <a:lnSpc>
+                <a:spcPct val="128000"/>
+              </a:lnSpc>
+              <a:buNone/>
+            </a:pPr>
+            <a:r>
+              <a:rPr lang="en-US" sz="1200" dirty="0">
                 <a:solidFill>
                   <a:srgbClr val="5C6B85"/>
-                </a:solidFill>
-                <a:latin typeface="Courier New" pitchFamily="34" charset="0"/>
-                <a:ea typeface="Courier New" pitchFamily="34" charset="-122"/>
-                <a:cs typeface="Courier New" pitchFamily="34" charset="-120"/>
-              </a:rPr>
-              <a:t>python prep_offline_data.py  (works fully offline after this)</a:t>
-            </a:r>
-            <a:endParaRPr lang="en-US" sz="1300" dirty="0"/>
-          </a:p>
-        </p:txBody>
-      </p:sp>
-      <p:sp>
-        <p:nvSpPr>
-          <p:cNvPr id="12" name="Shape 8"/>
-          <p:cNvSpPr/>
-          <p:nvPr/>
-        </p:nvSpPr>
-        <p:spPr>
-          <a:xfrm>
-            <a:off x="548640" y="3931920"/>
-            <a:ext cx="512064" cy="512064"/>
-          </a:xfrm>
-          <a:prstGeom prst="ellipse">
-            <a:avLst/>
-          </a:prstGeom>
-          <a:solidFill>
-            <a:srgbClr val="1C7293"/>
-          </a:solidFill>
-          <a:ln/>
-        </p:spPr>
-        <p:txBody>
-          <a:bodyPr/>
-          <a:lstStyle/>
-          <a:p>
-            <a:endParaRPr lang="en-US"/>
-          </a:p>
-        </p:txBody>
-      </p:sp>
-      <p:pic>
-        <p:nvPicPr>
-          <p:cNvPr id="13" name="Image 2" descr="/home/claude/ibis-talk/icons/server.png"/>
-          <p:cNvPicPr>
-            <a:picLocks noChangeAspect="1"/>
-          </p:cNvPicPr>
-          <p:nvPr/>
-        </p:nvPicPr>
-        <p:blipFill>
-          <a:blip r:embed="rId5"/>
-          <a:stretch>
-            <a:fillRect/>
-          </a:stretch>
-        </p:blipFill>
-        <p:spPr>
-          <a:xfrm>
-            <a:off x="610088" y="3993368"/>
-            <a:ext cx="389169" cy="389169"/>
-          </a:xfrm>
-          <a:prstGeom prst="rect">
-            <a:avLst/>
-          </a:prstGeom>
-        </p:spPr>
-      </p:pic>
-      <p:sp>
-        <p:nvSpPr>
-          <p:cNvPr id="14" name="Text 9"/>
-          <p:cNvSpPr txBox="1"/>
-          <p:nvPr/>
-        </p:nvSpPr>
-        <p:spPr>
-          <a:xfrm>
-            <a:off x="1234440" y="3904488"/>
-            <a:ext cx="3749040" cy="548640"/>
-          </a:xfrm>
-          <a:prstGeom prst="rect">
-            <a:avLst/>
-          </a:prstGeom>
-          <a:noFill/>
-          <a:ln/>
-        </p:spPr>
-        <p:txBody>
-          <a:bodyPr wrap="square" lIns="0" tIns="0" rIns="0" bIns="0" rtlCol="0" anchor="ctr"/>
-          <a:lstStyle/>
-          <a:p>
-            <a:pPr marL="0" indent="0">
-              <a:buNone/>
-            </a:pPr>
-            <a:r>
-              <a:rPr lang="en-US" sz="1550" b="1" dirty="0">
-                <a:solidFill>
-                  <a:srgbClr val="21295C"/>
                 </a:solidFill>
                 <a:latin typeface="Calibri" pitchFamily="34" charset="0"/>
                 <a:ea typeface="Calibri" pitchFamily="34" charset="-122"/>
                 <a:cs typeface="Calibri" pitchFamily="34" charset="-120"/>
               </a:rPr>
-              <a:t>3. Get a Trino endpoint</a:t>
-            </a:r>
-            <a:endParaRPr lang="en-US" sz="1550" dirty="0"/>
-          </a:p>
-        </p:txBody>
-      </p:sp>
-      <p:sp>
-        <p:nvSpPr>
-          <p:cNvPr id="15" name="Text 10"/>
+              <a:t>Snowflake and BigQuery register the function in the warehouse: extra permissions and a new deploy step. The UDF story is per-backend, not write-once.</a:t>
+            </a:r>
+            <a:endParaRPr lang="en-US" sz="1200" dirty="0"/>
+          </a:p>
+        </p:txBody>
+      </p:sp>
+      <p:sp>
+        <p:nvSpPr>
+          <p:cNvPr id="19" name="Footnote"/>
           <p:cNvSpPr txBox="1"/>
           <p:nvPr/>
         </p:nvSpPr>
         <p:spPr>
           <a:xfrm>
-            <a:off x="5120640" y="3904488"/>
-            <a:ext cx="6492240" cy="548640"/>
+            <a:off x="548640" y="5560000"/>
+            <a:ext cx="11094720" cy="560000"/>
           </a:xfrm>
           <a:prstGeom prst="rect">
             <a:avLst/>
@@ -11147,97 +11477,7 @@
               <a:buNone/>
             </a:pPr>
             <a:r>
-              <a:rPr lang="en-US" sz="1300" dirty="0">
-                <a:solidFill>
-                  <a:srgbClr val="5C6B85"/>
-                </a:solidFill>
-                <a:latin typeface="Courier New" pitchFamily="34" charset="0"/>
-                <a:ea typeface="Courier New" pitchFamily="34" charset="-122"/>
-                <a:cs typeface="Courier New" pitchFamily="34" charset="-120"/>
-              </a:rPr>
-              <a:t>Local via Docker Compose, or a free Starburst Galaxy cluster</a:t>
-            </a:r>
-            <a:endParaRPr lang="en-US" sz="1300" dirty="0"/>
-          </a:p>
-        </p:txBody>
-      </p:sp>
-      <p:sp>
-        <p:nvSpPr>
-          <p:cNvPr id="16" name="Shape 11"/>
-          <p:cNvSpPr/>
-          <p:nvPr/>
-        </p:nvSpPr>
-        <p:spPr>
-          <a:xfrm>
-            <a:off x="548640" y="4937760"/>
-            <a:ext cx="512064" cy="512064"/>
-          </a:xfrm>
-          <a:prstGeom prst="ellipse">
-            <a:avLst/>
-          </a:prstGeom>
-          <a:solidFill>
-            <a:srgbClr val="1C7293"/>
-          </a:solidFill>
-          <a:ln/>
-        </p:spPr>
-        <p:txBody>
-          <a:bodyPr/>
-          <a:lstStyle/>
-          <a:p>
-            <a:endParaRPr lang="en-US"/>
-          </a:p>
-        </p:txBody>
-      </p:sp>
-      <p:pic>
-        <p:nvPicPr>
-          <p:cNvPr id="17" name="Image 3" descr="/home/claude/ibis-talk/icons/code.png"/>
-          <p:cNvPicPr>
-            <a:picLocks noChangeAspect="1"/>
-          </p:cNvPicPr>
-          <p:nvPr/>
-        </p:nvPicPr>
-        <p:blipFill>
-          <a:blip r:embed="rId6"/>
-          <a:stretch>
-            <a:fillRect/>
-          </a:stretch>
-        </p:blipFill>
-        <p:spPr>
-          <a:xfrm>
-            <a:off x="610088" y="4999208"/>
-            <a:ext cx="389169" cy="389169"/>
-          </a:xfrm>
-          <a:prstGeom prst="rect">
-            <a:avLst/>
-          </a:prstGeom>
-        </p:spPr>
-      </p:pic>
-      <p:sp>
-        <p:nvSpPr>
-          <p:cNvPr id="18" name="Text 12"/>
-          <p:cNvSpPr txBox="1"/>
-          <p:nvPr/>
-        </p:nvSpPr>
-        <p:spPr>
-          <a:xfrm>
-            <a:off x="1234440" y="4910328"/>
-            <a:ext cx="3749040" cy="548640"/>
-          </a:xfrm>
-          <a:prstGeom prst="rect">
-            <a:avLst/>
-          </a:prstGeom>
-          <a:noFill/>
-          <a:ln/>
-        </p:spPr>
-        <p:txBody>
-          <a:bodyPr wrap="square" lIns="0" tIns="0" rIns="0" bIns="0" rtlCol="0" anchor="ctr"/>
-          <a:lstStyle/>
-          <a:p>
-            <a:pPr marL="0" indent="0">
-              <a:buNone/>
-            </a:pPr>
-            <a:r>
-              <a:rPr lang="en-US" sz="1550" b="1" dirty="0">
+              <a:rPr lang="en-US" sz="1550" i="1" dirty="0">
                 <a:solidFill>
                   <a:srgbClr val="21295C"/>
                 </a:solidFill>
@@ -11245,7 +11485,7 @@
                 <a:ea typeface="Calibri" pitchFamily="34" charset="-122"/>
                 <a:cs typeface="Calibri" pitchFamily="34" charset="-120"/>
               </a:rPr>
-              <a:t>4. Open the notebook</a:t>
+              <a:t>Keep UDF logic out of the portable core — prefer .sql(), a builtin, or primitives Ibis already knows how to compile.</a:t>
             </a:r>
             <a:endParaRPr lang="en-US" sz="1550" dirty="0"/>
           </a:p>
@@ -11253,14 +11493,14 @@
       </p:sp>
       <p:sp>
         <p:nvSpPr>
-          <p:cNvPr id="19" name="Text 13"/>
+          <p:cNvPr id="20" name="FooterL"/>
           <p:cNvSpPr txBox="1"/>
           <p:nvPr/>
         </p:nvSpPr>
         <p:spPr>
           <a:xfrm>
-            <a:off x="5120640" y="4910328"/>
-            <a:ext cx="6492240" cy="548640"/>
+            <a:off x="548640" y="6473952"/>
+            <a:ext cx="7315200" cy="274320"/>
           </a:xfrm>
           <a:prstGeom prst="rect">
             <a:avLst/>
@@ -11276,92 +11516,14 @@
               <a:buNone/>
             </a:pPr>
             <a:r>
-              <a:rPr lang="en-US" sz="1300" dirty="0">
-                <a:solidFill>
-                  <a:srgbClr val="5C6B85"/>
-                </a:solidFill>
-                <a:latin typeface="Courier New" pitchFamily="34" charset="0"/>
-                <a:ea typeface="Courier New" pitchFamily="34" charset="-122"/>
-                <a:cs typeface="Courier New" pitchFamily="34" charset="-120"/>
-              </a:rPr>
-              <a:t>jupyter lab ibis_optionality_demo.ipynb</a:t>
-            </a:r>
-            <a:endParaRPr lang="en-US" sz="1300" dirty="0"/>
-          </a:p>
-        </p:txBody>
-      </p:sp>
-      <p:sp>
-        <p:nvSpPr>
-          <p:cNvPr id="20" name="Text 14"/>
-          <p:cNvSpPr txBox="1"/>
-          <p:nvPr/>
-        </p:nvSpPr>
-        <p:spPr>
-          <a:xfrm>
-            <a:off x="548640" y="5989320"/>
-            <a:ext cx="10515600" cy="365760"/>
-          </a:xfrm>
-          <a:prstGeom prst="rect">
-            <a:avLst/>
-          </a:prstGeom>
-          <a:noFill/>
-          <a:ln/>
-        </p:spPr>
-        <p:txBody>
-          <a:bodyPr wrap="square" lIns="0" tIns="0" rIns="0" bIns="0" rtlCol="0" anchor="ctr"/>
-          <a:lstStyle/>
-          <a:p>
-            <a:pPr marL="0" indent="0">
-              <a:buNone/>
-            </a:pPr>
-            <a:r>
-              <a:rPr lang="en-US" sz="1300" i="1" dirty="0">
-                <a:solidFill>
-                  <a:srgbClr val="5C6B85"/>
+              <a:rPr lang="en-US" sz="900" dirty="0">
+                <a:solidFill>
+                  <a:srgbClr val="9AA6BD"/>
                 </a:solidFill>
                 <a:latin typeface="Calibri" pitchFamily="34" charset="0"/>
                 <a:ea typeface="Calibri" pitchFamily="34" charset="-122"/>
                 <a:cs typeface="Calibri" pitchFamily="34" charset="-120"/>
               </a:rPr>
-              <a:t>Full setup instructions, including both Trino options, are in SETUP.md.</a:t>
-            </a:r>
-            <a:endParaRPr lang="en-US" sz="1300" dirty="0"/>
-          </a:p>
-        </p:txBody>
-      </p:sp>
-      <p:sp>
-        <p:nvSpPr>
-          <p:cNvPr id="21" name="Text 15"/>
-          <p:cNvSpPr txBox="1"/>
-          <p:nvPr/>
-        </p:nvSpPr>
-        <p:spPr>
-          <a:xfrm>
-            <a:off x="548640" y="6473952"/>
-            <a:ext cx="7315200" cy="274320"/>
-          </a:xfrm>
-          <a:prstGeom prst="rect">
-            <a:avLst/>
-          </a:prstGeom>
-          <a:noFill/>
-          <a:ln/>
-        </p:spPr>
-        <p:txBody>
-          <a:bodyPr wrap="square" lIns="0" tIns="0" rIns="0" bIns="0" rtlCol="0" anchor="ctr"/>
-          <a:lstStyle/>
-          <a:p>
-            <a:pPr marL="0" indent="0">
-              <a:buNone/>
-            </a:pPr>
-            <a:r>
-              <a:rPr lang="en-US" sz="900" dirty="0">
-                <a:solidFill>
-                  <a:srgbClr val="9AA6BD"/>
-                </a:solidFill>
-                <a:latin typeface="Calibri" pitchFamily="34" charset="0"/>
-                <a:ea typeface="Calibri" pitchFamily="34" charset="-122"/>
-                <a:cs typeface="Calibri" pitchFamily="34" charset="-120"/>
-              </a:rPr>
               <a:t>Ibis: Bringing Optionality to Python Dataframes</a:t>
             </a:r>
             <a:endParaRPr lang="en-US" sz="900" dirty="0"/>
@@ -11370,7 +11532,7 @@
       </p:sp>
       <p:sp>
         <p:nvSpPr>
-          <p:cNvPr id="22" name="Text 16"/>
+          <p:cNvPr id="21" name="FooterR"/>
           <p:cNvSpPr txBox="1"/>
           <p:nvPr/>
         </p:nvSpPr>
@@ -12834,6 +12996,36 @@
           </a:p>
         </p:txBody>
       </p:sp>
+      <p:pic>
+        <p:nvPicPr>
+          <p:cNvPr id="17" name="Picture 16" descr="Cartoon penguin - Openclipart">
+            <a:extLst>
+              <a:ext uri="{FF2B5EF4-FFF2-40B4-BE49-F238E27FC236}">
+                <a16:creationId xmlns:a16="http://schemas.microsoft.com/office/drawing/2014/main" id="{65CE8E3E-222C-5137-FC1B-3B7D11E8629C}"/>
+              </a:ext>
+            </a:extLst>
+          </p:cNvPr>
+          <p:cNvPicPr>
+            <a:picLocks noChangeAspect="1"/>
+          </p:cNvPicPr>
+          <p:nvPr/>
+        </p:nvPicPr>
+        <p:blipFill>
+          <a:blip r:embed="rId5"/>
+          <a:stretch>
+            <a:fillRect/>
+          </a:stretch>
+        </p:blipFill>
+        <p:spPr>
+          <a:xfrm>
+            <a:off x="9475994" y="4488302"/>
+            <a:ext cx="1932187" cy="1932187"/>
+          </a:xfrm>
+          <a:prstGeom prst="rect">
+            <a:avLst/>
+          </a:prstGeom>
+        </p:spPr>
+      </p:pic>
     </p:spTree>
   </p:cSld>
   <p:clrMapOvr>
@@ -12843,6 +13035,1431 @@
 </file>
 
 <file path=ppt/slides/slide20.xml><?xml version="1.0" encoding="utf-8"?>
+<p:sld xmlns:a="http://schemas.openxmlformats.org/drawingml/2006/main" xmlns:r="http://schemas.openxmlformats.org/officeDocument/2006/relationships" xmlns:p="http://schemas.openxmlformats.org/presentationml/2006/main">
+  <p:cSld name="Slide 18">
+    <p:bg>
+      <p:bgPr>
+        <a:solidFill>
+          <a:srgbClr val="FFFFFF"/>
+        </a:solidFill>
+        <a:effectLst/>
+      </p:bgPr>
+    </p:bg>
+    <p:spTree>
+      <p:nvGrpSpPr>
+        <p:cNvPr id="1" name=""/>
+        <p:cNvGrpSpPr/>
+        <p:nvPr/>
+      </p:nvGrpSpPr>
+      <p:grpSpPr>
+        <a:xfrm>
+          <a:off x="0" y="0"/>
+          <a:ext cx="0" cy="0"/>
+          <a:chOff x="0" y="0"/>
+          <a:chExt cx="0" cy="0"/>
+        </a:xfrm>
+      </p:grpSpPr>
+      <p:sp>
+        <p:nvSpPr>
+          <p:cNvPr id="2" name="Text 0"/>
+          <p:cNvSpPr txBox="1"/>
+          <p:nvPr/>
+        </p:nvSpPr>
+        <p:spPr>
+          <a:xfrm>
+            <a:off x="548640" y="457200"/>
+            <a:ext cx="7315200" cy="365760"/>
+          </a:xfrm>
+          <a:prstGeom prst="rect">
+            <a:avLst/>
+          </a:prstGeom>
+          <a:noFill/>
+          <a:ln/>
+        </p:spPr>
+        <p:txBody>
+          <a:bodyPr wrap="square" lIns="0" tIns="0" rIns="0" bIns="0" rtlCol="0" anchor="ctr"/>
+          <a:lstStyle/>
+          <a:p>
+            <a:pPr marL="0" indent="0">
+              <a:buNone/>
+            </a:pPr>
+            <a:r>
+              <a:rPr lang="en-US" sz="1300" b="1" kern="0" spc="200" dirty="0">
+                <a:solidFill>
+                  <a:srgbClr val="1C7293"/>
+                </a:solidFill>
+                <a:latin typeface="Calibri" pitchFamily="34" charset="0"/>
+                <a:ea typeface="Calibri" pitchFamily="34" charset="-122"/>
+                <a:cs typeface="Calibri" pitchFamily="34" charset="-120"/>
+              </a:rPr>
+              <a:t>WHY IT MATTERS</a:t>
+            </a:r>
+            <a:endParaRPr lang="en-US" sz="1300" dirty="0"/>
+          </a:p>
+        </p:txBody>
+      </p:sp>
+      <p:sp>
+        <p:nvSpPr>
+          <p:cNvPr id="3" name="Text 1"/>
+          <p:cNvSpPr txBox="1"/>
+          <p:nvPr/>
+        </p:nvSpPr>
+        <p:spPr>
+          <a:xfrm>
+            <a:off x="548640" y="777240"/>
+            <a:ext cx="10725912" cy="822960"/>
+          </a:xfrm>
+          <a:prstGeom prst="rect">
+            <a:avLst/>
+          </a:prstGeom>
+          <a:noFill/>
+          <a:ln/>
+        </p:spPr>
+        <p:txBody>
+          <a:bodyPr wrap="square" lIns="0" tIns="0" rIns="0" bIns="0" rtlCol="0" anchor="ctr"/>
+          <a:lstStyle/>
+          <a:p>
+            <a:pPr marL="0" indent="0">
+              <a:buNone/>
+            </a:pPr>
+            <a:r>
+              <a:rPr lang="en-US" sz="3200" b="1" dirty="0">
+                <a:solidFill>
+                  <a:srgbClr val="21295C"/>
+                </a:solidFill>
+                <a:latin typeface="Cambria" pitchFamily="34" charset="0"/>
+                <a:ea typeface="Cambria" pitchFamily="34" charset="-122"/>
+                <a:cs typeface="Cambria" pitchFamily="34" charset="-120"/>
+              </a:rPr>
+              <a:t>Optionality is leverage — for your project &amp; your career</a:t>
+            </a:r>
+            <a:endParaRPr lang="en-US" sz="3200" dirty="0"/>
+          </a:p>
+        </p:txBody>
+      </p:sp>
+      <p:sp>
+        <p:nvSpPr>
+          <p:cNvPr id="4" name="Shape 2"/>
+          <p:cNvSpPr/>
+          <p:nvPr/>
+        </p:nvSpPr>
+        <p:spPr>
+          <a:xfrm>
+            <a:off x="548640" y="1965960"/>
+            <a:ext cx="3520440" cy="3566160"/>
+          </a:xfrm>
+          <a:prstGeom prst="roundRect">
+            <a:avLst>
+              <a:gd name="adj" fmla="val 2597"/>
+            </a:avLst>
+          </a:prstGeom>
+          <a:solidFill>
+            <a:srgbClr val="EEF3F7"/>
+          </a:solidFill>
+          <a:ln/>
+        </p:spPr>
+        <p:txBody>
+          <a:bodyPr/>
+          <a:lstStyle/>
+          <a:p>
+            <a:endParaRPr lang="en-US"/>
+          </a:p>
+        </p:txBody>
+      </p:sp>
+      <p:sp>
+        <p:nvSpPr>
+          <p:cNvPr id="5" name="Shape 3"/>
+          <p:cNvSpPr/>
+          <p:nvPr/>
+        </p:nvSpPr>
+        <p:spPr>
+          <a:xfrm>
+            <a:off x="841248" y="2258568"/>
+            <a:ext cx="566928" cy="566928"/>
+          </a:xfrm>
+          <a:prstGeom prst="ellipse">
+            <a:avLst/>
+          </a:prstGeom>
+          <a:solidFill>
+            <a:srgbClr val="065A82"/>
+          </a:solidFill>
+          <a:ln/>
+        </p:spPr>
+        <p:txBody>
+          <a:bodyPr/>
+          <a:lstStyle/>
+          <a:p>
+            <a:endParaRPr lang="en-US"/>
+          </a:p>
+        </p:txBody>
+      </p:sp>
+      <p:pic>
+        <p:nvPicPr>
+          <p:cNvPr id="6" name="Image 0" descr="/home/claude/ibis-talk/icons/bolt.png"/>
+          <p:cNvPicPr>
+            <a:picLocks noChangeAspect="1"/>
+          </p:cNvPicPr>
+          <p:nvPr/>
+        </p:nvPicPr>
+        <p:blipFill>
+          <a:blip r:embed="rId3"/>
+          <a:stretch>
+            <a:fillRect/>
+          </a:stretch>
+        </p:blipFill>
+        <p:spPr>
+          <a:xfrm>
+            <a:off x="909279" y="2326599"/>
+            <a:ext cx="430865" cy="430865"/>
+          </a:xfrm>
+          <a:prstGeom prst="rect">
+            <a:avLst/>
+          </a:prstGeom>
+        </p:spPr>
+      </p:pic>
+      <p:sp>
+        <p:nvSpPr>
+          <p:cNvPr id="7" name="Text 4"/>
+          <p:cNvSpPr txBox="1"/>
+          <p:nvPr/>
+        </p:nvSpPr>
+        <p:spPr>
+          <a:xfrm>
+            <a:off x="841248" y="3063240"/>
+            <a:ext cx="2935224" cy="868680"/>
+          </a:xfrm>
+          <a:prstGeom prst="rect">
+            <a:avLst/>
+          </a:prstGeom>
+          <a:noFill/>
+          <a:ln/>
+        </p:spPr>
+        <p:txBody>
+          <a:bodyPr wrap="square" lIns="0" tIns="0" rIns="0" bIns="0" rtlCol="0" anchor="ctr"/>
+          <a:lstStyle/>
+          <a:p>
+            <a:pPr marL="0" indent="0">
+              <a:lnSpc>
+                <a:spcPct val="115000"/>
+              </a:lnSpc>
+              <a:buNone/>
+            </a:pPr>
+            <a:r>
+              <a:rPr lang="en-US" sz="1650" b="1" dirty="0">
+                <a:solidFill>
+                  <a:srgbClr val="21295C"/>
+                </a:solidFill>
+                <a:latin typeface="Cambria" pitchFamily="34" charset="0"/>
+                <a:ea typeface="Cambria" pitchFamily="34" charset="-122"/>
+                <a:cs typeface="Cambria" pitchFamily="34" charset="-120"/>
+              </a:rPr>
+              <a:t>Prototype fast, ship without rewrites</a:t>
+            </a:r>
+            <a:endParaRPr lang="en-US" sz="1650" dirty="0"/>
+          </a:p>
+        </p:txBody>
+      </p:sp>
+      <p:sp>
+        <p:nvSpPr>
+          <p:cNvPr id="8" name="Text 5"/>
+          <p:cNvSpPr txBox="1"/>
+          <p:nvPr/>
+        </p:nvSpPr>
+        <p:spPr>
+          <a:xfrm>
+            <a:off x="841248" y="3931920"/>
+            <a:ext cx="2935224" cy="1417320"/>
+          </a:xfrm>
+          <a:prstGeom prst="rect">
+            <a:avLst/>
+          </a:prstGeom>
+          <a:noFill/>
+          <a:ln/>
+        </p:spPr>
+        <p:txBody>
+          <a:bodyPr wrap="square" lIns="0" tIns="0" rIns="0" bIns="0" rtlCol="0" anchor="ctr"/>
+          <a:lstStyle/>
+          <a:p>
+            <a:pPr marL="0" indent="0">
+              <a:lnSpc>
+                <a:spcPct val="130000"/>
+              </a:lnSpc>
+              <a:buNone/>
+            </a:pPr>
+            <a:r>
+              <a:rPr lang="en-US" sz="1300" dirty="0">
+                <a:solidFill>
+                  <a:srgbClr val="5C6B85"/>
+                </a:solidFill>
+                <a:latin typeface="Calibri" pitchFamily="34" charset="0"/>
+                <a:ea typeface="Calibri" pitchFamily="34" charset="-122"/>
+                <a:cs typeface="Calibri" pitchFamily="34" charset="-120"/>
+              </a:rPr>
+              <a:t>Build and test locally on DuckDB, then point at production infrastructure with a config change, not a rewrite.</a:t>
+            </a:r>
+            <a:endParaRPr lang="en-US" sz="1300" dirty="0"/>
+          </a:p>
+        </p:txBody>
+      </p:sp>
+      <p:sp>
+        <p:nvSpPr>
+          <p:cNvPr id="9" name="Shape 6"/>
+          <p:cNvSpPr/>
+          <p:nvPr/>
+        </p:nvSpPr>
+        <p:spPr>
+          <a:xfrm>
+            <a:off x="4343400" y="1965960"/>
+            <a:ext cx="3520440" cy="3566160"/>
+          </a:xfrm>
+          <a:prstGeom prst="roundRect">
+            <a:avLst>
+              <a:gd name="adj" fmla="val 2597"/>
+            </a:avLst>
+          </a:prstGeom>
+          <a:solidFill>
+            <a:srgbClr val="EEF3F7"/>
+          </a:solidFill>
+          <a:ln/>
+        </p:spPr>
+        <p:txBody>
+          <a:bodyPr/>
+          <a:lstStyle/>
+          <a:p>
+            <a:endParaRPr lang="en-US"/>
+          </a:p>
+        </p:txBody>
+      </p:sp>
+      <p:sp>
+        <p:nvSpPr>
+          <p:cNvPr id="10" name="Shape 7"/>
+          <p:cNvSpPr/>
+          <p:nvPr/>
+        </p:nvSpPr>
+        <p:spPr>
+          <a:xfrm>
+            <a:off x="4636008" y="2258568"/>
+            <a:ext cx="566928" cy="566928"/>
+          </a:xfrm>
+          <a:prstGeom prst="ellipse">
+            <a:avLst/>
+          </a:prstGeom>
+          <a:solidFill>
+            <a:srgbClr val="065A82"/>
+          </a:solidFill>
+          <a:ln/>
+        </p:spPr>
+        <p:txBody>
+          <a:bodyPr/>
+          <a:lstStyle/>
+          <a:p>
+            <a:endParaRPr lang="en-US"/>
+          </a:p>
+        </p:txBody>
+      </p:sp>
+      <p:pic>
+        <p:nvPicPr>
+          <p:cNvPr id="11" name="Image 1" descr="/home/claude/ibis-talk/icons/route.png"/>
+          <p:cNvPicPr>
+            <a:picLocks noChangeAspect="1"/>
+          </p:cNvPicPr>
+          <p:nvPr/>
+        </p:nvPicPr>
+        <p:blipFill>
+          <a:blip r:embed="rId4"/>
+          <a:stretch>
+            <a:fillRect/>
+          </a:stretch>
+        </p:blipFill>
+        <p:spPr>
+          <a:xfrm>
+            <a:off x="4704039" y="2326599"/>
+            <a:ext cx="430865" cy="430865"/>
+          </a:xfrm>
+          <a:prstGeom prst="rect">
+            <a:avLst/>
+          </a:prstGeom>
+        </p:spPr>
+      </p:pic>
+      <p:sp>
+        <p:nvSpPr>
+          <p:cNvPr id="12" name="Text 8"/>
+          <p:cNvSpPr txBox="1"/>
+          <p:nvPr/>
+        </p:nvSpPr>
+        <p:spPr>
+          <a:xfrm>
+            <a:off x="4636008" y="3063240"/>
+            <a:ext cx="2935224" cy="868680"/>
+          </a:xfrm>
+          <a:prstGeom prst="rect">
+            <a:avLst/>
+          </a:prstGeom>
+          <a:noFill/>
+          <a:ln/>
+        </p:spPr>
+        <p:txBody>
+          <a:bodyPr wrap="square" lIns="0" tIns="0" rIns="0" bIns="0" rtlCol="0" anchor="ctr"/>
+          <a:lstStyle/>
+          <a:p>
+            <a:pPr marL="0" indent="0">
+              <a:lnSpc>
+                <a:spcPct val="115000"/>
+              </a:lnSpc>
+              <a:buNone/>
+            </a:pPr>
+            <a:r>
+              <a:rPr lang="en-US" sz="1650" b="1" dirty="0">
+                <a:solidFill>
+                  <a:srgbClr val="21295C"/>
+                </a:solidFill>
+                <a:latin typeface="Cambria" pitchFamily="34" charset="0"/>
+                <a:ea typeface="Cambria" pitchFamily="34" charset="-122"/>
+                <a:cs typeface="Cambria" pitchFamily="34" charset="-120"/>
+              </a:rPr>
+              <a:t>Never married to one platform</a:t>
+            </a:r>
+            <a:endParaRPr lang="en-US" sz="1650" dirty="0"/>
+          </a:p>
+        </p:txBody>
+      </p:sp>
+      <p:sp>
+        <p:nvSpPr>
+          <p:cNvPr id="13" name="Text 9"/>
+          <p:cNvSpPr txBox="1"/>
+          <p:nvPr/>
+        </p:nvSpPr>
+        <p:spPr>
+          <a:xfrm>
+            <a:off x="4636008" y="3931920"/>
+            <a:ext cx="2935224" cy="1417320"/>
+          </a:xfrm>
+          <a:prstGeom prst="rect">
+            <a:avLst/>
+          </a:prstGeom>
+          <a:noFill/>
+          <a:ln/>
+        </p:spPr>
+        <p:txBody>
+          <a:bodyPr wrap="square" lIns="0" tIns="0" rIns="0" bIns="0" rtlCol="0" anchor="ctr"/>
+          <a:lstStyle/>
+          <a:p>
+            <a:pPr marL="0" indent="0">
+              <a:lnSpc>
+                <a:spcPct val="130000"/>
+              </a:lnSpc>
+              <a:buNone/>
+            </a:pPr>
+            <a:r>
+              <a:rPr lang="en-US" sz="1300" dirty="0">
+                <a:solidFill>
+                  <a:srgbClr val="5C6B85"/>
+                </a:solidFill>
+                <a:latin typeface="Calibri" pitchFamily="34" charset="0"/>
+                <a:ea typeface="Calibri" pitchFamily="34" charset="-122"/>
+                <a:cs typeface="Calibri" pitchFamily="34" charset="-120"/>
+              </a:rPr>
+              <a:t>Your team's stack changes. Ibis code mostly doesn't have to.</a:t>
+            </a:r>
+            <a:endParaRPr lang="en-US" sz="1300" dirty="0"/>
+          </a:p>
+        </p:txBody>
+      </p:sp>
+      <p:sp>
+        <p:nvSpPr>
+          <p:cNvPr id="14" name="Shape 10"/>
+          <p:cNvSpPr/>
+          <p:nvPr/>
+        </p:nvSpPr>
+        <p:spPr>
+          <a:xfrm>
+            <a:off x="8138160" y="1965960"/>
+            <a:ext cx="3520440" cy="3566160"/>
+          </a:xfrm>
+          <a:prstGeom prst="roundRect">
+            <a:avLst>
+              <a:gd name="adj" fmla="val 2597"/>
+            </a:avLst>
+          </a:prstGeom>
+          <a:solidFill>
+            <a:srgbClr val="EEF3F7"/>
+          </a:solidFill>
+          <a:ln/>
+        </p:spPr>
+        <p:txBody>
+          <a:bodyPr/>
+          <a:lstStyle/>
+          <a:p>
+            <a:endParaRPr lang="en-US"/>
+          </a:p>
+        </p:txBody>
+      </p:sp>
+      <p:sp>
+        <p:nvSpPr>
+          <p:cNvPr id="15" name="Shape 11"/>
+          <p:cNvSpPr/>
+          <p:nvPr/>
+        </p:nvSpPr>
+        <p:spPr>
+          <a:xfrm>
+            <a:off x="8430768" y="2258568"/>
+            <a:ext cx="566928" cy="566928"/>
+          </a:xfrm>
+          <a:prstGeom prst="ellipse">
+            <a:avLst/>
+          </a:prstGeom>
+          <a:solidFill>
+            <a:srgbClr val="065A82"/>
+          </a:solidFill>
+          <a:ln/>
+        </p:spPr>
+        <p:txBody>
+          <a:bodyPr/>
+          <a:lstStyle/>
+          <a:p>
+            <a:endParaRPr lang="en-US"/>
+          </a:p>
+        </p:txBody>
+      </p:sp>
+      <p:pic>
+        <p:nvPicPr>
+          <p:cNvPr id="16" name="Image 2" descr="/home/claude/ibis-talk/icons/check.png"/>
+          <p:cNvPicPr>
+            <a:picLocks noChangeAspect="1"/>
+          </p:cNvPicPr>
+          <p:nvPr/>
+        </p:nvPicPr>
+        <p:blipFill>
+          <a:blip r:embed="rId5"/>
+          <a:stretch>
+            <a:fillRect/>
+          </a:stretch>
+        </p:blipFill>
+        <p:spPr>
+          <a:xfrm>
+            <a:off x="8498799" y="2326599"/>
+            <a:ext cx="430865" cy="430865"/>
+          </a:xfrm>
+          <a:prstGeom prst="rect">
+            <a:avLst/>
+          </a:prstGeom>
+        </p:spPr>
+      </p:pic>
+      <p:sp>
+        <p:nvSpPr>
+          <p:cNvPr id="17" name="Text 12"/>
+          <p:cNvSpPr txBox="1"/>
+          <p:nvPr/>
+        </p:nvSpPr>
+        <p:spPr>
+          <a:xfrm>
+            <a:off x="8430768" y="3063240"/>
+            <a:ext cx="2935224" cy="868680"/>
+          </a:xfrm>
+          <a:prstGeom prst="rect">
+            <a:avLst/>
+          </a:prstGeom>
+          <a:noFill/>
+          <a:ln/>
+        </p:spPr>
+        <p:txBody>
+          <a:bodyPr wrap="square" lIns="0" tIns="0" rIns="0" bIns="0" rtlCol="0" anchor="ctr"/>
+          <a:lstStyle/>
+          <a:p>
+            <a:pPr marL="0" indent="0">
+              <a:lnSpc>
+                <a:spcPct val="115000"/>
+              </a:lnSpc>
+              <a:buNone/>
+            </a:pPr>
+            <a:r>
+              <a:rPr lang="en-US" sz="1650" b="1" dirty="0">
+                <a:solidFill>
+                  <a:srgbClr val="21295C"/>
+                </a:solidFill>
+                <a:latin typeface="Cambria" pitchFamily="34" charset="0"/>
+                <a:ea typeface="Cambria" pitchFamily="34" charset="-122"/>
+                <a:cs typeface="Cambria" pitchFamily="34" charset="-120"/>
+              </a:rPr>
+              <a:t>One skill, every employer's stack</a:t>
+            </a:r>
+            <a:endParaRPr lang="en-US" sz="1650" dirty="0"/>
+          </a:p>
+        </p:txBody>
+      </p:sp>
+      <p:sp>
+        <p:nvSpPr>
+          <p:cNvPr id="18" name="Text 13"/>
+          <p:cNvSpPr txBox="1"/>
+          <p:nvPr/>
+        </p:nvSpPr>
+        <p:spPr>
+          <a:xfrm>
+            <a:off x="8430768" y="3931920"/>
+            <a:ext cx="2935224" cy="1417320"/>
+          </a:xfrm>
+          <a:prstGeom prst="rect">
+            <a:avLst/>
+          </a:prstGeom>
+          <a:noFill/>
+          <a:ln/>
+        </p:spPr>
+        <p:txBody>
+          <a:bodyPr wrap="square" lIns="0" tIns="0" rIns="0" bIns="0" rtlCol="0" anchor="ctr"/>
+          <a:lstStyle/>
+          <a:p>
+            <a:pPr marL="0" indent="0">
+              <a:lnSpc>
+                <a:spcPct val="130000"/>
+              </a:lnSpc>
+              <a:buNone/>
+            </a:pPr>
+            <a:r>
+              <a:rPr lang="en-US" sz="1300" dirty="0">
+                <a:solidFill>
+                  <a:srgbClr val="5C6B85"/>
+                </a:solidFill>
+                <a:latin typeface="Calibri" pitchFamily="34" charset="0"/>
+                <a:ea typeface="Calibri" pitchFamily="34" charset="-122"/>
+                <a:cs typeface="Calibri" pitchFamily="34" charset="-120"/>
+              </a:rPr>
+              <a:t>Whatever warehouse or engine your next job runs, there's a good chance Ibis already speaks to it.</a:t>
+            </a:r>
+            <a:endParaRPr lang="en-US" sz="1300" dirty="0"/>
+          </a:p>
+        </p:txBody>
+      </p:sp>
+      <p:sp>
+        <p:nvSpPr>
+          <p:cNvPr id="19" name="Text 14"/>
+          <p:cNvSpPr txBox="1"/>
+          <p:nvPr/>
+        </p:nvSpPr>
+        <p:spPr>
+          <a:xfrm>
+            <a:off x="548640" y="6473952"/>
+            <a:ext cx="7315200" cy="274320"/>
+          </a:xfrm>
+          <a:prstGeom prst="rect">
+            <a:avLst/>
+          </a:prstGeom>
+          <a:noFill/>
+          <a:ln/>
+        </p:spPr>
+        <p:txBody>
+          <a:bodyPr wrap="square" lIns="0" tIns="0" rIns="0" bIns="0" rtlCol="0" anchor="ctr"/>
+          <a:lstStyle/>
+          <a:p>
+            <a:pPr marL="0" indent="0">
+              <a:buNone/>
+            </a:pPr>
+            <a:r>
+              <a:rPr lang="en-US" sz="900" dirty="0">
+                <a:solidFill>
+                  <a:srgbClr val="9AA6BD"/>
+                </a:solidFill>
+                <a:latin typeface="Calibri" pitchFamily="34" charset="0"/>
+                <a:ea typeface="Calibri" pitchFamily="34" charset="-122"/>
+                <a:cs typeface="Calibri" pitchFamily="34" charset="-120"/>
+              </a:rPr>
+              <a:t>Ibis: Bringing Optionality to Python Dataframes</a:t>
+            </a:r>
+            <a:endParaRPr lang="en-US" sz="900" dirty="0"/>
+          </a:p>
+        </p:txBody>
+      </p:sp>
+      <p:sp>
+        <p:nvSpPr>
+          <p:cNvPr id="20" name="Text 15"/>
+          <p:cNvSpPr txBox="1"/>
+          <p:nvPr/>
+        </p:nvSpPr>
+        <p:spPr>
+          <a:xfrm>
+            <a:off x="11274552" y="6473952"/>
+            <a:ext cx="457200" cy="274320"/>
+          </a:xfrm>
+          <a:prstGeom prst="rect">
+            <a:avLst/>
+          </a:prstGeom>
+          <a:noFill/>
+          <a:ln/>
+        </p:spPr>
+        <p:txBody>
+          <a:bodyPr wrap="square" lIns="0" tIns="0" rIns="0" bIns="0" rtlCol="0" anchor="ctr"/>
+          <a:lstStyle/>
+          <a:p>
+            <a:pPr marL="0" indent="0" algn="r">
+              <a:buNone/>
+            </a:pPr>
+            <a:r>
+              <a:rPr lang="en-US" sz="900" dirty="0">
+                <a:solidFill>
+                  <a:srgbClr val="9AA6BD"/>
+                </a:solidFill>
+                <a:latin typeface="Calibri" pitchFamily="34" charset="0"/>
+                <a:ea typeface="Calibri" pitchFamily="34" charset="-122"/>
+                <a:cs typeface="Calibri" pitchFamily="34" charset="-120"/>
+              </a:rPr>
+              <a:t>20</a:t>
+            </a:r>
+            <a:endParaRPr lang="en-US" sz="900" dirty="0"/>
+          </a:p>
+        </p:txBody>
+      </p:sp>
+    </p:spTree>
+  </p:cSld>
+  <p:clrMapOvr>
+    <a:masterClrMapping/>
+  </p:clrMapOvr>
+</p:sld>
+</file>
+
+<file path=ppt/slides/slide21.xml><?xml version="1.0" encoding="utf-8"?>
+<p:sld xmlns:a="http://schemas.openxmlformats.org/drawingml/2006/main" xmlns:r="http://schemas.openxmlformats.org/officeDocument/2006/relationships" xmlns:p="http://schemas.openxmlformats.org/presentationml/2006/main">
+  <p:cSld name="Slide 19">
+    <p:bg>
+      <p:bgPr>
+        <a:solidFill>
+          <a:srgbClr val="FFFFFF"/>
+        </a:solidFill>
+        <a:effectLst/>
+      </p:bgPr>
+    </p:bg>
+    <p:spTree>
+      <p:nvGrpSpPr>
+        <p:cNvPr id="1" name=""/>
+        <p:cNvGrpSpPr/>
+        <p:nvPr/>
+      </p:nvGrpSpPr>
+      <p:grpSpPr>
+        <a:xfrm>
+          <a:off x="0" y="0"/>
+          <a:ext cx="0" cy="0"/>
+          <a:chOff x="0" y="0"/>
+          <a:chExt cx="0" cy="0"/>
+        </a:xfrm>
+      </p:grpSpPr>
+      <p:sp>
+        <p:nvSpPr>
+          <p:cNvPr id="2" name="Text 0"/>
+          <p:cNvSpPr txBox="1"/>
+          <p:nvPr/>
+        </p:nvSpPr>
+        <p:spPr>
+          <a:xfrm>
+            <a:off x="548640" y="457200"/>
+            <a:ext cx="7315200" cy="365760"/>
+          </a:xfrm>
+          <a:prstGeom prst="rect">
+            <a:avLst/>
+          </a:prstGeom>
+          <a:noFill/>
+          <a:ln/>
+        </p:spPr>
+        <p:txBody>
+          <a:bodyPr wrap="square" lIns="0" tIns="0" rIns="0" bIns="0" rtlCol="0" anchor="ctr"/>
+          <a:lstStyle/>
+          <a:p>
+            <a:pPr marL="0" indent="0">
+              <a:buNone/>
+            </a:pPr>
+            <a:r>
+              <a:rPr lang="en-US" sz="1300" b="1" kern="0" spc="200" dirty="0">
+                <a:solidFill>
+                  <a:srgbClr val="1C7293"/>
+                </a:solidFill>
+                <a:latin typeface="Calibri" pitchFamily="34" charset="0"/>
+                <a:ea typeface="Calibri" pitchFamily="34" charset="-122"/>
+                <a:cs typeface="Calibri" pitchFamily="34" charset="-120"/>
+              </a:rPr>
+              <a:t>FOLLOW ALONG</a:t>
+            </a:r>
+            <a:endParaRPr lang="en-US" sz="1300" dirty="0"/>
+          </a:p>
+        </p:txBody>
+      </p:sp>
+      <p:sp>
+        <p:nvSpPr>
+          <p:cNvPr id="3" name="Text 1"/>
+          <p:cNvSpPr txBox="1"/>
+          <p:nvPr/>
+        </p:nvSpPr>
+        <p:spPr>
+          <a:xfrm>
+            <a:off x="548640" y="777240"/>
+            <a:ext cx="9601200" cy="822960"/>
+          </a:xfrm>
+          <a:prstGeom prst="rect">
+            <a:avLst/>
+          </a:prstGeom>
+          <a:noFill/>
+          <a:ln/>
+        </p:spPr>
+        <p:txBody>
+          <a:bodyPr wrap="square" lIns="0" tIns="0" rIns="0" bIns="0" rtlCol="0" anchor="ctr"/>
+          <a:lstStyle/>
+          <a:p>
+            <a:pPr marL="0" indent="0">
+              <a:buNone/>
+            </a:pPr>
+            <a:r>
+              <a:rPr lang="en-US" sz="3200" b="1" dirty="0">
+                <a:solidFill>
+                  <a:srgbClr val="21295C"/>
+                </a:solidFill>
+                <a:latin typeface="Cambria" pitchFamily="34" charset="0"/>
+                <a:ea typeface="Cambria" pitchFamily="34" charset="-122"/>
+                <a:cs typeface="Cambria" pitchFamily="34" charset="-120"/>
+              </a:rPr>
+              <a:t>Run this exact demo yourself, tonight or next week</a:t>
+            </a:r>
+            <a:endParaRPr lang="en-US" sz="3200" dirty="0"/>
+          </a:p>
+        </p:txBody>
+      </p:sp>
+      <p:sp>
+        <p:nvSpPr>
+          <p:cNvPr id="4" name="Shape 2"/>
+          <p:cNvSpPr/>
+          <p:nvPr/>
+        </p:nvSpPr>
+        <p:spPr>
+          <a:xfrm>
+            <a:off x="548640" y="1920240"/>
+            <a:ext cx="512064" cy="512064"/>
+          </a:xfrm>
+          <a:prstGeom prst="ellipse">
+            <a:avLst/>
+          </a:prstGeom>
+          <a:solidFill>
+            <a:srgbClr val="1C7293"/>
+          </a:solidFill>
+          <a:ln/>
+        </p:spPr>
+        <p:txBody>
+          <a:bodyPr/>
+          <a:lstStyle/>
+          <a:p>
+            <a:endParaRPr lang="en-US"/>
+          </a:p>
+        </p:txBody>
+      </p:sp>
+      <p:pic>
+        <p:nvPicPr>
+          <p:cNvPr id="5" name="Image 0" descr="/home/claude/ibis-talk/icons/laptop.png"/>
+          <p:cNvPicPr>
+            <a:picLocks noChangeAspect="1"/>
+          </p:cNvPicPr>
+          <p:nvPr/>
+        </p:nvPicPr>
+        <p:blipFill>
+          <a:blip r:embed="rId3"/>
+          <a:stretch>
+            <a:fillRect/>
+          </a:stretch>
+        </p:blipFill>
+        <p:spPr>
+          <a:xfrm>
+            <a:off x="610088" y="1981688"/>
+            <a:ext cx="389169" cy="389169"/>
+          </a:xfrm>
+          <a:prstGeom prst="rect">
+            <a:avLst/>
+          </a:prstGeom>
+        </p:spPr>
+      </p:pic>
+      <p:sp>
+        <p:nvSpPr>
+          <p:cNvPr id="6" name="Text 3"/>
+          <p:cNvSpPr txBox="1"/>
+          <p:nvPr/>
+        </p:nvSpPr>
+        <p:spPr>
+          <a:xfrm>
+            <a:off x="1234440" y="1892808"/>
+            <a:ext cx="3749040" cy="548640"/>
+          </a:xfrm>
+          <a:prstGeom prst="rect">
+            <a:avLst/>
+          </a:prstGeom>
+          <a:noFill/>
+          <a:ln/>
+        </p:spPr>
+        <p:txBody>
+          <a:bodyPr wrap="square" lIns="0" tIns="0" rIns="0" bIns="0" rtlCol="0" anchor="ctr"/>
+          <a:lstStyle/>
+          <a:p>
+            <a:pPr marL="0" indent="0">
+              <a:buNone/>
+            </a:pPr>
+            <a:r>
+              <a:rPr lang="en-US" sz="1550" b="1" dirty="0">
+                <a:solidFill>
+                  <a:srgbClr val="21295C"/>
+                </a:solidFill>
+                <a:latin typeface="Calibri" pitchFamily="34" charset="0"/>
+                <a:ea typeface="Calibri" pitchFamily="34" charset="-122"/>
+                <a:cs typeface="Calibri" pitchFamily="34" charset="-120"/>
+              </a:rPr>
+              <a:t>1. Clone the repo &amp; install</a:t>
+            </a:r>
+            <a:endParaRPr lang="en-US" sz="1550" dirty="0"/>
+          </a:p>
+        </p:txBody>
+      </p:sp>
+      <p:sp>
+        <p:nvSpPr>
+          <p:cNvPr id="7" name="Text 4"/>
+          <p:cNvSpPr txBox="1"/>
+          <p:nvPr/>
+        </p:nvSpPr>
+        <p:spPr>
+          <a:xfrm>
+            <a:off x="5120640" y="1892808"/>
+            <a:ext cx="6492240" cy="548640"/>
+          </a:xfrm>
+          <a:prstGeom prst="rect">
+            <a:avLst/>
+          </a:prstGeom>
+          <a:noFill/>
+          <a:ln/>
+        </p:spPr>
+        <p:txBody>
+          <a:bodyPr wrap="square" lIns="0" tIns="0" rIns="0" bIns="0" rtlCol="0" anchor="ctr"/>
+          <a:lstStyle/>
+          <a:p>
+            <a:pPr marL="0" indent="0">
+              <a:buNone/>
+            </a:pPr>
+            <a:r>
+              <a:rPr lang="en-US" sz="1300" dirty="0">
+                <a:solidFill>
+                  <a:srgbClr val="5C6B85"/>
+                </a:solidFill>
+                <a:latin typeface="Courier New" pitchFamily="34" charset="0"/>
+                <a:ea typeface="Courier New" pitchFamily="34" charset="-122"/>
+                <a:cs typeface="Courier New" pitchFamily="34" charset="-120"/>
+              </a:rPr>
+              <a:t>pip install -r requirements.txt</a:t>
+            </a:r>
+            <a:endParaRPr lang="en-US" sz="1300" dirty="0"/>
+          </a:p>
+        </p:txBody>
+      </p:sp>
+      <p:sp>
+        <p:nvSpPr>
+          <p:cNvPr id="8" name="Shape 5"/>
+          <p:cNvSpPr/>
+          <p:nvPr/>
+        </p:nvSpPr>
+        <p:spPr>
+          <a:xfrm>
+            <a:off x="548640" y="2926080"/>
+            <a:ext cx="512064" cy="512064"/>
+          </a:xfrm>
+          <a:prstGeom prst="ellipse">
+            <a:avLst/>
+          </a:prstGeom>
+          <a:solidFill>
+            <a:srgbClr val="1C7293"/>
+          </a:solidFill>
+          <a:ln/>
+        </p:spPr>
+        <p:txBody>
+          <a:bodyPr/>
+          <a:lstStyle/>
+          <a:p>
+            <a:endParaRPr lang="en-US"/>
+          </a:p>
+        </p:txBody>
+      </p:sp>
+      <p:pic>
+        <p:nvPicPr>
+          <p:cNvPr id="9" name="Image 1" descr="/home/claude/ibis-talk/icons/database.png"/>
+          <p:cNvPicPr>
+            <a:picLocks noChangeAspect="1"/>
+          </p:cNvPicPr>
+          <p:nvPr/>
+        </p:nvPicPr>
+        <p:blipFill>
+          <a:blip r:embed="rId4"/>
+          <a:stretch>
+            <a:fillRect/>
+          </a:stretch>
+        </p:blipFill>
+        <p:spPr>
+          <a:xfrm>
+            <a:off x="610088" y="2987528"/>
+            <a:ext cx="389169" cy="389169"/>
+          </a:xfrm>
+          <a:prstGeom prst="rect">
+            <a:avLst/>
+          </a:prstGeom>
+        </p:spPr>
+      </p:pic>
+      <p:sp>
+        <p:nvSpPr>
+          <p:cNvPr id="10" name="Text 6"/>
+          <p:cNvSpPr txBox="1"/>
+          <p:nvPr/>
+        </p:nvSpPr>
+        <p:spPr>
+          <a:xfrm>
+            <a:off x="1234440" y="2898648"/>
+            <a:ext cx="3749040" cy="548640"/>
+          </a:xfrm>
+          <a:prstGeom prst="rect">
+            <a:avLst/>
+          </a:prstGeom>
+          <a:noFill/>
+          <a:ln/>
+        </p:spPr>
+        <p:txBody>
+          <a:bodyPr wrap="square" lIns="0" tIns="0" rIns="0" bIns="0" rtlCol="0" anchor="ctr"/>
+          <a:lstStyle/>
+          <a:p>
+            <a:pPr marL="0" indent="0">
+              <a:buNone/>
+            </a:pPr>
+            <a:r>
+              <a:rPr lang="en-US" sz="1550" b="1" dirty="0">
+                <a:solidFill>
+                  <a:srgbClr val="21295C"/>
+                </a:solidFill>
+                <a:latin typeface="Calibri" pitchFamily="34" charset="0"/>
+                <a:ea typeface="Calibri" pitchFamily="34" charset="-122"/>
+                <a:cs typeface="Calibri" pitchFamily="34" charset="-120"/>
+              </a:rPr>
+              <a:t>2. Cache the demo dataset</a:t>
+            </a:r>
+            <a:endParaRPr lang="en-US" sz="1550" dirty="0"/>
+          </a:p>
+        </p:txBody>
+      </p:sp>
+      <p:sp>
+        <p:nvSpPr>
+          <p:cNvPr id="11" name="Text 7"/>
+          <p:cNvSpPr txBox="1"/>
+          <p:nvPr/>
+        </p:nvSpPr>
+        <p:spPr>
+          <a:xfrm>
+            <a:off x="5120640" y="2898648"/>
+            <a:ext cx="6492240" cy="548640"/>
+          </a:xfrm>
+          <a:prstGeom prst="rect">
+            <a:avLst/>
+          </a:prstGeom>
+          <a:noFill/>
+          <a:ln/>
+        </p:spPr>
+        <p:txBody>
+          <a:bodyPr wrap="square" lIns="0" tIns="0" rIns="0" bIns="0" rtlCol="0" anchor="ctr"/>
+          <a:lstStyle/>
+          <a:p>
+            <a:pPr marL="0" indent="0">
+              <a:buNone/>
+            </a:pPr>
+            <a:r>
+              <a:rPr lang="en-US" sz="1300" dirty="0">
+                <a:solidFill>
+                  <a:srgbClr val="5C6B85"/>
+                </a:solidFill>
+                <a:latin typeface="Courier New" pitchFamily="34" charset="0"/>
+                <a:ea typeface="Courier New" pitchFamily="34" charset="-122"/>
+                <a:cs typeface="Courier New" pitchFamily="34" charset="-120"/>
+              </a:rPr>
+              <a:t>python prep_offline_data.py  (works fully offline after this)</a:t>
+            </a:r>
+            <a:endParaRPr lang="en-US" sz="1300" dirty="0"/>
+          </a:p>
+        </p:txBody>
+      </p:sp>
+      <p:sp>
+        <p:nvSpPr>
+          <p:cNvPr id="12" name="Shape 8"/>
+          <p:cNvSpPr/>
+          <p:nvPr/>
+        </p:nvSpPr>
+        <p:spPr>
+          <a:xfrm>
+            <a:off x="548640" y="3931920"/>
+            <a:ext cx="512064" cy="512064"/>
+          </a:xfrm>
+          <a:prstGeom prst="ellipse">
+            <a:avLst/>
+          </a:prstGeom>
+          <a:solidFill>
+            <a:srgbClr val="1C7293"/>
+          </a:solidFill>
+          <a:ln/>
+        </p:spPr>
+        <p:txBody>
+          <a:bodyPr/>
+          <a:lstStyle/>
+          <a:p>
+            <a:endParaRPr lang="en-US"/>
+          </a:p>
+        </p:txBody>
+      </p:sp>
+      <p:pic>
+        <p:nvPicPr>
+          <p:cNvPr id="13" name="Image 2" descr="/home/claude/ibis-talk/icons/server.png"/>
+          <p:cNvPicPr>
+            <a:picLocks noChangeAspect="1"/>
+          </p:cNvPicPr>
+          <p:nvPr/>
+        </p:nvPicPr>
+        <p:blipFill>
+          <a:blip r:embed="rId5"/>
+          <a:stretch>
+            <a:fillRect/>
+          </a:stretch>
+        </p:blipFill>
+        <p:spPr>
+          <a:xfrm>
+            <a:off x="610088" y="3993368"/>
+            <a:ext cx="389169" cy="389169"/>
+          </a:xfrm>
+          <a:prstGeom prst="rect">
+            <a:avLst/>
+          </a:prstGeom>
+        </p:spPr>
+      </p:pic>
+      <p:sp>
+        <p:nvSpPr>
+          <p:cNvPr id="14" name="Text 9"/>
+          <p:cNvSpPr txBox="1"/>
+          <p:nvPr/>
+        </p:nvSpPr>
+        <p:spPr>
+          <a:xfrm>
+            <a:off x="1234440" y="3904488"/>
+            <a:ext cx="3749040" cy="548640"/>
+          </a:xfrm>
+          <a:prstGeom prst="rect">
+            <a:avLst/>
+          </a:prstGeom>
+          <a:noFill/>
+          <a:ln/>
+        </p:spPr>
+        <p:txBody>
+          <a:bodyPr wrap="square" lIns="0" tIns="0" rIns="0" bIns="0" rtlCol="0" anchor="ctr"/>
+          <a:lstStyle/>
+          <a:p>
+            <a:pPr marL="0" indent="0">
+              <a:buNone/>
+            </a:pPr>
+            <a:r>
+              <a:rPr lang="en-US" sz="1550" b="1" dirty="0">
+                <a:solidFill>
+                  <a:srgbClr val="21295C"/>
+                </a:solidFill>
+                <a:latin typeface="Calibri" pitchFamily="34" charset="0"/>
+                <a:ea typeface="Calibri" pitchFamily="34" charset="-122"/>
+                <a:cs typeface="Calibri" pitchFamily="34" charset="-120"/>
+              </a:rPr>
+              <a:t>3. Get a Trino endpoint</a:t>
+            </a:r>
+            <a:endParaRPr lang="en-US" sz="1550" dirty="0"/>
+          </a:p>
+        </p:txBody>
+      </p:sp>
+      <p:sp>
+        <p:nvSpPr>
+          <p:cNvPr id="15" name="Text 10"/>
+          <p:cNvSpPr txBox="1"/>
+          <p:nvPr/>
+        </p:nvSpPr>
+        <p:spPr>
+          <a:xfrm>
+            <a:off x="5120640" y="3904488"/>
+            <a:ext cx="6492240" cy="548640"/>
+          </a:xfrm>
+          <a:prstGeom prst="rect">
+            <a:avLst/>
+          </a:prstGeom>
+          <a:noFill/>
+          <a:ln/>
+        </p:spPr>
+        <p:txBody>
+          <a:bodyPr wrap="square" lIns="0" tIns="0" rIns="0" bIns="0" rtlCol="0" anchor="ctr"/>
+          <a:lstStyle/>
+          <a:p>
+            <a:pPr marL="0" indent="0">
+              <a:buNone/>
+            </a:pPr>
+            <a:r>
+              <a:rPr lang="en-US" sz="1300" dirty="0">
+                <a:solidFill>
+                  <a:srgbClr val="5C6B85"/>
+                </a:solidFill>
+                <a:latin typeface="Courier New" pitchFamily="34" charset="0"/>
+                <a:ea typeface="Courier New" pitchFamily="34" charset="-122"/>
+                <a:cs typeface="Courier New" pitchFamily="34" charset="-120"/>
+              </a:rPr>
+              <a:t>Local via Docker Compose, or a free Starburst Galaxy cluster</a:t>
+            </a:r>
+            <a:endParaRPr lang="en-US" sz="1300" dirty="0"/>
+          </a:p>
+        </p:txBody>
+      </p:sp>
+      <p:sp>
+        <p:nvSpPr>
+          <p:cNvPr id="16" name="Shape 11"/>
+          <p:cNvSpPr/>
+          <p:nvPr/>
+        </p:nvSpPr>
+        <p:spPr>
+          <a:xfrm>
+            <a:off x="548640" y="4937760"/>
+            <a:ext cx="512064" cy="512064"/>
+          </a:xfrm>
+          <a:prstGeom prst="ellipse">
+            <a:avLst/>
+          </a:prstGeom>
+          <a:solidFill>
+            <a:srgbClr val="1C7293"/>
+          </a:solidFill>
+          <a:ln/>
+        </p:spPr>
+        <p:txBody>
+          <a:bodyPr/>
+          <a:lstStyle/>
+          <a:p>
+            <a:endParaRPr lang="en-US"/>
+          </a:p>
+        </p:txBody>
+      </p:sp>
+      <p:pic>
+        <p:nvPicPr>
+          <p:cNvPr id="17" name="Image 3" descr="/home/claude/ibis-talk/icons/code.png"/>
+          <p:cNvPicPr>
+            <a:picLocks noChangeAspect="1"/>
+          </p:cNvPicPr>
+          <p:nvPr/>
+        </p:nvPicPr>
+        <p:blipFill>
+          <a:blip r:embed="rId6"/>
+          <a:stretch>
+            <a:fillRect/>
+          </a:stretch>
+        </p:blipFill>
+        <p:spPr>
+          <a:xfrm>
+            <a:off x="610088" y="4999208"/>
+            <a:ext cx="389169" cy="389169"/>
+          </a:xfrm>
+          <a:prstGeom prst="rect">
+            <a:avLst/>
+          </a:prstGeom>
+        </p:spPr>
+      </p:pic>
+      <p:sp>
+        <p:nvSpPr>
+          <p:cNvPr id="18" name="Text 12"/>
+          <p:cNvSpPr txBox="1"/>
+          <p:nvPr/>
+        </p:nvSpPr>
+        <p:spPr>
+          <a:xfrm>
+            <a:off x="1234440" y="4910328"/>
+            <a:ext cx="3749040" cy="548640"/>
+          </a:xfrm>
+          <a:prstGeom prst="rect">
+            <a:avLst/>
+          </a:prstGeom>
+          <a:noFill/>
+          <a:ln/>
+        </p:spPr>
+        <p:txBody>
+          <a:bodyPr wrap="square" lIns="0" tIns="0" rIns="0" bIns="0" rtlCol="0" anchor="ctr"/>
+          <a:lstStyle/>
+          <a:p>
+            <a:pPr marL="0" indent="0">
+              <a:buNone/>
+            </a:pPr>
+            <a:r>
+              <a:rPr lang="en-US" sz="1550" b="1" dirty="0">
+                <a:solidFill>
+                  <a:srgbClr val="21295C"/>
+                </a:solidFill>
+                <a:latin typeface="Calibri" pitchFamily="34" charset="0"/>
+                <a:ea typeface="Calibri" pitchFamily="34" charset="-122"/>
+                <a:cs typeface="Calibri" pitchFamily="34" charset="-120"/>
+              </a:rPr>
+              <a:t>4. Open the notebook</a:t>
+            </a:r>
+            <a:endParaRPr lang="en-US" sz="1550" dirty="0"/>
+          </a:p>
+        </p:txBody>
+      </p:sp>
+      <p:sp>
+        <p:nvSpPr>
+          <p:cNvPr id="19" name="Text 13"/>
+          <p:cNvSpPr txBox="1"/>
+          <p:nvPr/>
+        </p:nvSpPr>
+        <p:spPr>
+          <a:xfrm>
+            <a:off x="5120640" y="4910328"/>
+            <a:ext cx="6492240" cy="548640"/>
+          </a:xfrm>
+          <a:prstGeom prst="rect">
+            <a:avLst/>
+          </a:prstGeom>
+          <a:noFill/>
+          <a:ln/>
+        </p:spPr>
+        <p:txBody>
+          <a:bodyPr wrap="square" lIns="0" tIns="0" rIns="0" bIns="0" rtlCol="0" anchor="ctr"/>
+          <a:lstStyle/>
+          <a:p>
+            <a:pPr marL="0" indent="0">
+              <a:buNone/>
+            </a:pPr>
+            <a:r>
+              <a:rPr lang="en-US" sz="1300" dirty="0">
+                <a:solidFill>
+                  <a:srgbClr val="5C6B85"/>
+                </a:solidFill>
+                <a:latin typeface="Courier New" pitchFamily="34" charset="0"/>
+                <a:ea typeface="Courier New" pitchFamily="34" charset="-122"/>
+                <a:cs typeface="Courier New" pitchFamily="34" charset="-120"/>
+              </a:rPr>
+              <a:t>jupyter lab ibis_optionality_demo.ipynb</a:t>
+            </a:r>
+            <a:endParaRPr lang="en-US" sz="1300" dirty="0"/>
+          </a:p>
+        </p:txBody>
+      </p:sp>
+      <p:sp>
+        <p:nvSpPr>
+          <p:cNvPr id="20" name="Text 14"/>
+          <p:cNvSpPr txBox="1"/>
+          <p:nvPr/>
+        </p:nvSpPr>
+        <p:spPr>
+          <a:xfrm>
+            <a:off x="548640" y="5989320"/>
+            <a:ext cx="10515600" cy="365760"/>
+          </a:xfrm>
+          <a:prstGeom prst="rect">
+            <a:avLst/>
+          </a:prstGeom>
+          <a:noFill/>
+          <a:ln/>
+        </p:spPr>
+        <p:txBody>
+          <a:bodyPr wrap="square" lIns="0" tIns="0" rIns="0" bIns="0" rtlCol="0" anchor="ctr"/>
+          <a:lstStyle/>
+          <a:p>
+            <a:pPr marL="0" indent="0">
+              <a:buNone/>
+            </a:pPr>
+            <a:r>
+              <a:rPr lang="en-US" sz="1300" i="1" dirty="0">
+                <a:solidFill>
+                  <a:srgbClr val="5C6B85"/>
+                </a:solidFill>
+                <a:latin typeface="Calibri" pitchFamily="34" charset="0"/>
+                <a:ea typeface="Calibri" pitchFamily="34" charset="-122"/>
+                <a:cs typeface="Calibri" pitchFamily="34" charset="-120"/>
+              </a:rPr>
+              <a:t>Full setup instructions, including both Trino options, are in SETUP.md.</a:t>
+            </a:r>
+            <a:endParaRPr lang="en-US" sz="1300" dirty="0"/>
+          </a:p>
+        </p:txBody>
+      </p:sp>
+      <p:sp>
+        <p:nvSpPr>
+          <p:cNvPr id="21" name="Text 15"/>
+          <p:cNvSpPr txBox="1"/>
+          <p:nvPr/>
+        </p:nvSpPr>
+        <p:spPr>
+          <a:xfrm>
+            <a:off x="548640" y="6473952"/>
+            <a:ext cx="7315200" cy="274320"/>
+          </a:xfrm>
+          <a:prstGeom prst="rect">
+            <a:avLst/>
+          </a:prstGeom>
+          <a:noFill/>
+          <a:ln/>
+        </p:spPr>
+        <p:txBody>
+          <a:bodyPr wrap="square" lIns="0" tIns="0" rIns="0" bIns="0" rtlCol="0" anchor="ctr"/>
+          <a:lstStyle/>
+          <a:p>
+            <a:pPr marL="0" indent="0">
+              <a:buNone/>
+            </a:pPr>
+            <a:r>
+              <a:rPr lang="en-US" sz="900" dirty="0">
+                <a:solidFill>
+                  <a:srgbClr val="9AA6BD"/>
+                </a:solidFill>
+                <a:latin typeface="Calibri" pitchFamily="34" charset="0"/>
+                <a:ea typeface="Calibri" pitchFamily="34" charset="-122"/>
+                <a:cs typeface="Calibri" pitchFamily="34" charset="-120"/>
+              </a:rPr>
+              <a:t>Ibis: Bringing Optionality to Python Dataframes</a:t>
+            </a:r>
+            <a:endParaRPr lang="en-US" sz="900" dirty="0"/>
+          </a:p>
+        </p:txBody>
+      </p:sp>
+      <p:sp>
+        <p:nvSpPr>
+          <p:cNvPr id="22" name="Text 16"/>
+          <p:cNvSpPr txBox="1"/>
+          <p:nvPr/>
+        </p:nvSpPr>
+        <p:spPr>
+          <a:xfrm>
+            <a:off x="11274552" y="6473952"/>
+            <a:ext cx="457200" cy="274320"/>
+          </a:xfrm>
+          <a:prstGeom prst="rect">
+            <a:avLst/>
+          </a:prstGeom>
+          <a:noFill/>
+          <a:ln/>
+        </p:spPr>
+        <p:txBody>
+          <a:bodyPr wrap="square" lIns="0" tIns="0" rIns="0" bIns="0" rtlCol="0" anchor="ctr"/>
+          <a:lstStyle/>
+          <a:p>
+            <a:pPr marL="0" indent="0" algn="r">
+              <a:buNone/>
+            </a:pPr>
+            <a:r>
+              <a:rPr lang="en-US" sz="900" dirty="0">
+                <a:solidFill>
+                  <a:srgbClr val="9AA6BD"/>
+                </a:solidFill>
+                <a:latin typeface="Calibri" pitchFamily="34" charset="0"/>
+                <a:ea typeface="Calibri" pitchFamily="34" charset="-122"/>
+                <a:cs typeface="Calibri" pitchFamily="34" charset="-120"/>
+              </a:rPr>
+              <a:t>21</a:t>
+            </a:r>
+            <a:endParaRPr lang="en-US" sz="900" dirty="0"/>
+          </a:p>
+        </p:txBody>
+      </p:sp>
+    </p:spTree>
+  </p:cSld>
+  <p:clrMapOvr>
+    <a:masterClrMapping/>
+  </p:clrMapOvr>
+</p:sld>
+</file>
+
+<file path=ppt/slides/slide22.xml><?xml version="1.0" encoding="utf-8"?>
 <p:sld xmlns:a="http://schemas.openxmlformats.org/drawingml/2006/main" xmlns:r="http://schemas.openxmlformats.org/officeDocument/2006/relationships" xmlns:p="http://schemas.openxmlformats.org/presentationml/2006/main">
   <p:cSld name="Slide 20">
     <p:bg>
@@ -13347,7 +14964,7 @@
               <a:buNone/>
             </a:pPr>
             <a:r>
-              <a:rPr lang="en-US" sz="1250" dirty="0">
+              <a:rPr lang="en-US" sz="1250" dirty="0" err="1">
                 <a:solidFill>
                   <a:srgbClr val="9FB3C8"/>
                 </a:solidFill>
@@ -13355,7 +14972,40 @@
                 <a:ea typeface="Courier New" pitchFamily="34" charset="-122"/>
                 <a:cs typeface="Courier New" pitchFamily="34" charset="-120"/>
               </a:rPr>
-              <a:t>github.com/your-handle/ibis-optionality-talk</a:t>
+              <a:t>github.com</a:t>
+            </a:r>
+            <a:r>
+              <a:rPr lang="en-US" sz="1250" dirty="0">
+                <a:solidFill>
+                  <a:srgbClr val="9FB3C8"/>
+                </a:solidFill>
+                <a:latin typeface="Courier New" pitchFamily="34" charset="0"/>
+                <a:ea typeface="Courier New" pitchFamily="34" charset="-122"/>
+                <a:cs typeface="Courier New" pitchFamily="34" charset="-120"/>
+              </a:rPr>
+              <a:t>/</a:t>
+            </a:r>
+            <a:r>
+              <a:rPr lang="en-US" sz="1250" dirty="0" err="1">
+                <a:solidFill>
+                  <a:srgbClr val="9FB3C8"/>
+                </a:solidFill>
+                <a:latin typeface="Courier New" pitchFamily="34" charset="0"/>
+                <a:ea typeface="Courier New" pitchFamily="34" charset="-122"/>
+                <a:cs typeface="Courier New" pitchFamily="34" charset="-120"/>
+              </a:rPr>
+              <a:t>lestermartin</a:t>
+            </a:r>
+            <a:r>
+              <a:rPr lang="en-US" sz="1250" dirty="0">
+                <a:solidFill>
+                  <a:srgbClr val="9FB3C8"/>
+                </a:solidFill>
+                <a:latin typeface="Courier New" pitchFamily="34" charset="0"/>
+                <a:ea typeface="Courier New" pitchFamily="34" charset="-122"/>
+                <a:cs typeface="Courier New" pitchFamily="34" charset="-120"/>
+              </a:rPr>
+              <a:t>/ibis-optionality</a:t>
             </a:r>
             <a:endParaRPr lang="en-US" sz="1250" dirty="0"/>
           </a:p>
@@ -13433,7 +15083,7 @@
                 <a:ea typeface="Calibri" pitchFamily="34" charset="-122"/>
                 <a:cs typeface="Calibri" pitchFamily="34" charset="-120"/>
               </a:rPr>
-              <a:t>20</a:t>
+              <a:t>22</a:t>
             </a:r>
             <a:endParaRPr lang="en-US" sz="900" dirty="0"/>
           </a:p>
@@ -14888,7 +16538,29 @@
                 <a:ea typeface="Cambria" pitchFamily="34" charset="-122"/>
                 <a:cs typeface="Cambria" pitchFamily="34" charset="-120"/>
               </a:rPr>
-              <a:t>Every Python dataframe library picks one engine for you</a:t>
+              <a:t>Python </a:t>
+            </a:r>
+            <a:r>
+              <a:rPr lang="en-US" sz="3200" b="1" dirty="0" err="1">
+                <a:solidFill>
+                  <a:srgbClr val="21295C"/>
+                </a:solidFill>
+                <a:latin typeface="Cambria" pitchFamily="34" charset="0"/>
+                <a:ea typeface="Cambria" pitchFamily="34" charset="-122"/>
+                <a:cs typeface="Cambria" pitchFamily="34" charset="-120"/>
+              </a:rPr>
+              <a:t>dataframe</a:t>
+            </a:r>
+            <a:r>
+              <a:rPr lang="en-US" sz="3200" b="1" dirty="0">
+                <a:solidFill>
+                  <a:srgbClr val="21295C"/>
+                </a:solidFill>
+                <a:latin typeface="Cambria" pitchFamily="34" charset="0"/>
+                <a:ea typeface="Cambria" pitchFamily="34" charset="-122"/>
+                <a:cs typeface="Cambria" pitchFamily="34" charset="-120"/>
+              </a:rPr>
+              <a:t> libraries pick the engine for you</a:t>
             </a:r>
             <a:endParaRPr lang="en-US" sz="3200" dirty="0"/>
           </a:p>
@@ -15550,7 +17222,7 @@
                 <a:ea typeface="Cambria" pitchFamily="34" charset="-122"/>
                 <a:cs typeface="Cambria" pitchFamily="34" charset="-120"/>
               </a:rPr>
-              <a:t>Warehouse SQL</a:t>
+              <a:t>Warehouse Specific</a:t>
             </a:r>
             <a:endParaRPr lang="en-US" sz="1800" dirty="0"/>
           </a:p>
@@ -15592,9 +17264,8 @@
                 <a:ea typeface="Calibri" pitchFamily="34" charset="-122"/>
                 <a:cs typeface="Calibri" pitchFamily="34" charset="-120"/>
               </a:rPr>
-              <a:t>Powerful engine.</a:t>
-            </a:r>
-            <a:endParaRPr lang="en-US" sz="1250" dirty="0"/>
+              <a:t>All have SQL.</a:t>
+            </a:r>
           </a:p>
           <a:p>
             <a:pPr marL="0" indent="0" algn="ctr">
@@ -15612,7 +17283,44 @@
                 <a:ea typeface="Calibri" pitchFamily="34" charset="-122"/>
                 <a:cs typeface="Calibri" pitchFamily="34" charset="-120"/>
               </a:rPr>
-              <a:t>No Python dataframe ergonomics at all.</a:t>
+              <a:t>Some have a</a:t>
+            </a:r>
+            <a:r>
+              <a:rPr lang="en-US" sz="1250" dirty="0"/>
+              <a:t> </a:t>
+            </a:r>
+            <a:r>
+              <a:rPr lang="en-US" sz="1250" dirty="0">
+                <a:solidFill>
+                  <a:srgbClr val="5C6B85"/>
+                </a:solidFill>
+                <a:latin typeface="Calibri" pitchFamily="34" charset="0"/>
+                <a:ea typeface="Calibri" pitchFamily="34" charset="-122"/>
+                <a:cs typeface="Calibri" pitchFamily="34" charset="-120"/>
+              </a:rPr>
+              <a:t>proprietary </a:t>
+            </a:r>
+            <a:r>
+              <a:rPr lang="en-US" sz="1250" dirty="0" err="1">
+                <a:solidFill>
+                  <a:srgbClr val="5C6B85"/>
+                </a:solidFill>
+                <a:latin typeface="Calibri" pitchFamily="34" charset="0"/>
+                <a:ea typeface="Calibri" pitchFamily="34" charset="-122"/>
+                <a:cs typeface="Calibri" pitchFamily="34" charset="-120"/>
+              </a:rPr>
+              <a:t>dataframe</a:t>
+            </a:r>
+            <a:r>
+              <a:rPr lang="en-US" sz="1250" dirty="0">
+                <a:solidFill>
+                  <a:srgbClr val="5C6B85"/>
+                </a:solidFill>
+                <a:latin typeface="Calibri" pitchFamily="34" charset="0"/>
+                <a:ea typeface="Calibri" pitchFamily="34" charset="-122"/>
+                <a:cs typeface="Calibri" pitchFamily="34" charset="-120"/>
+              </a:rPr>
+              <a:t> API.</a:t>
             </a:r>
             <a:endParaRPr lang="en-US" sz="1250" dirty="0"/>
           </a:p>
@@ -15922,7 +17630,7 @@
                 <a:ea typeface="Calibri" pitchFamily="34" charset="-122"/>
                 <a:cs typeface="Calibri" pitchFamily="34" charset="-120"/>
               </a:rPr>
-              <a:t>nearly 20 backend engines</a:t>
+              <a:t>greater than 20 backend engines</a:t>
             </a:r>
             <a:r>
               <a:rPr lang="en-US" sz="1700" dirty="0">
@@ -17135,9 +18843,20 @@
                 <a:ea typeface="Calibri" pitchFamily="34" charset="-122"/>
                 <a:cs typeface="Calibri" pitchFamily="34" charset="-120"/>
               </a:rPr>
-              <a:t> — that's what "lazy" means.</a:t>
-            </a:r>
-            <a:endParaRPr lang="en-US" sz="1500" dirty="0"/>
+              <a:t> </a:t>
+            </a:r>
+            <a:r>
+              <a:rPr lang="en-US" sz="1500" i="1" dirty="0">
+                <a:solidFill>
+                  <a:srgbClr val="5C6B85"/>
+                </a:solidFill>
+                <a:latin typeface="Calibri" pitchFamily="34" charset="0"/>
+                <a:ea typeface="Calibri" pitchFamily="34" charset="-122"/>
+                <a:cs typeface="Calibri" pitchFamily="34" charset="-120"/>
+              </a:rPr>
+              <a:t>— this is lazy execution</a:t>
+            </a:r>
+            <a:endParaRPr lang="en-US" sz="1500" i="1" dirty="0"/>
           </a:p>
         </p:txBody>
       </p:sp>
@@ -17339,7 +19058,7 @@
           <p:nvPr>
             <p:extLst>
               <p:ext uri="{D42A27DB-BD31-4B8C-83A1-F6EECF244321}">
-                <p14:modId xmlns:p14="http://schemas.microsoft.com/office/powerpoint/2010/main" val="1579011935"/>
+                <p14:modId xmlns:p14="http://schemas.microsoft.com/office/powerpoint/2010/main" val="2329708195"/>
               </p:ext>
             </p:extLst>
           </p:nvPr>
@@ -17664,6 +19383,17 @@
                         <a:buNone/>
                       </a:pPr>
                       <a:r>
+                        <a:rPr lang="en-US" sz="1350">
+                          <a:solidFill>
+                            <a:srgbClr val="21295C"/>
+                          </a:solidFill>
+                          <a:latin typeface="Calibri" pitchFamily="34" charset="0"/>
+                          <a:ea typeface="Calibri" pitchFamily="34" charset="-122"/>
+                          <a:cs typeface="Calibri" pitchFamily="34" charset="-120"/>
+                        </a:rPr>
+                        <a:t>Identify  </a:t>
+                      </a:r>
+                      <a:r>
                         <a:rPr lang="en-US" sz="1350" dirty="0">
                           <a:solidFill>
                             <a:srgbClr val="21295C"/>
@@ -17672,7 +19402,7 @@
                           <a:ea typeface="Calibri" pitchFamily="34" charset="-122"/>
                           <a:cs typeface="Calibri" pitchFamily="34" charset="-120"/>
                         </a:rPr>
-                        <a:t>Choose columns</a:t>
+                        <a:t>columns</a:t>
                       </a:r>
                       <a:endParaRPr lang="en-US" sz="1350" dirty="0">
                         <a:latin typeface="Calibri" charset="0"/>
@@ -18094,7 +19824,7 @@
                           <a:ea typeface="Calibri" pitchFamily="34" charset="-122"/>
                           <a:cs typeface="Calibri" pitchFamily="34" charset="-120"/>
                         </a:rPr>
-                        <a:t>Add or transform a column</a:t>
+                        <a:t>Add or modify a column</a:t>
                       </a:r>
                       <a:endParaRPr lang="en-US" sz="1350" dirty="0">
                         <a:latin typeface="Calibri" charset="0"/>
